--- a/遊戲家新人教育訓練（完整版 v2.1 - 24張）.pptx
+++ b/遊戲家新人教育訓練（完整版 v2.1 - 24張）.pptx
@@ -3267,91 +3267,172 @@
           <a:noFill/>
         </p:spPr>
         <p:txBody>
+          <a:bodyPr wrap="none">
+            <a:spAutoFit/>
+          </a:bodyPr>
+          <a:lstStyle/>
+          <a:p>
+            <a:pPr>
+              <a:defRPr sz="3200" b="1">
+                <a:solidFill>
+                  <a:srgbClr val="2C3E50"/>
+                </a:solidFill>
+              </a:defRPr>
+            </a:pPr>
+            <a:r>
+              <a:t>📅 工作節奏與溝通</a:t>
+            </a:r>
+          </a:p>
+        </p:txBody>
+      </p:sp>
+      <p:sp>
+        <p:nvSpPr>
+          <p:cNvPr id="3" name="TextBox 2"/>
+          <p:cNvSpPr txBox="1"/>
+          <p:nvPr/>
+        </p:nvSpPr>
+        <p:spPr>
+          <a:xfrm>
+            <a:off x="1371600" y="1371600"/>
+            <a:ext cx="6400800" cy="5029200"/>
+          </a:xfrm>
+          <a:prstGeom prst="rect">
+            <a:avLst/>
+          </a:prstGeom>
+          <a:noFill/>
+        </p:spPr>
+        <p:txBody>
           <a:bodyPr wrap="square">
             <a:spAutoFit/>
           </a:bodyPr>
           <a:lstStyle/>
           <a:p>
-            <a:pPr algn="l">
-              <a:defRPr sz="3200" b="1">
-                <a:solidFill>
-                  <a:srgbClr val="2C3E50"/>
-                </a:solidFill>
-              </a:defRPr>
-            </a:pPr>
-            <a:r>
-              <a:t>📅 工作節奏與溝通</a:t>
-            </a:r>
-          </a:p>
-        </p:txBody>
-      </p:sp>
-      <p:sp>
-        <p:nvSpPr>
-          <p:cNvPr id="3" name="TextBox 2"/>
-          <p:cNvSpPr txBox="1"/>
-          <p:nvPr/>
-        </p:nvSpPr>
-        <p:spPr>
-          <a:xfrm>
-            <a:off x="1371600" y="1371600"/>
-            <a:ext cx="6400800" cy="5029200"/>
-          </a:xfrm>
-          <a:prstGeom prst="rect">
-            <a:avLst/>
-          </a:prstGeom>
-          <a:noFill/>
-        </p:spPr>
-        <p:txBody>
-          <a:bodyPr wrap="square">
-            <a:spAutoFit/>
-          </a:bodyPr>
-          <a:lstStyle/>
-          <a:p>
-            <a:pPr>
-              <a:defRPr sz="1800">
-                <a:solidFill>
-                  <a:srgbClr val="505050"/>
-                </a:solidFill>
-              </a:defRPr>
-            </a:pPr>
-            <a:r>
-              <a:t>每週二下午2:00 - 週會議</a:t>
-            </a:r>
-          </a:p>
-          <a:p>
-            <a:pPr>
-              <a:defRPr sz="1800">
-                <a:solidFill>
-                  <a:srgbClr val="505050"/>
-                </a:solidFill>
-              </a:defRPr>
-            </a:pPr>
-            <a:r>
-              <a:t>整理一週狀況、報告進度</a:t>
-            </a:r>
-          </a:p>
-          <a:p>
-            <a:pPr>
-              <a:defRPr sz="1800">
-                <a:solidFill>
-                  <a:srgbClr val="505050"/>
-                </a:solidFill>
-              </a:defRPr>
-            </a:pPr>
-            <a:r>
-              <a:t>群組即時溝通</a:t>
-            </a:r>
-          </a:p>
-          <a:p>
-            <a:pPr>
-              <a:defRPr sz="1800">
-                <a:solidFill>
-                  <a:srgbClr val="505050"/>
-                </a:solidFill>
-              </a:defRPr>
-            </a:pPr>
-            <a:r>
-              <a:t>重要事項開會再重複一次</a:t>
+            <a:pPr>
+              <a:defRPr sz="1600">
+                <a:solidFill>
+                  <a:srgbClr val="3C3C3C"/>
+                </a:solidFill>
+              </a:defRPr>
+            </a:pPr>
+            <a:r>
+              <a:t>每週二下午 2:00 - 週會議</a:t>
+            </a:r>
+          </a:p>
+          <a:p>
+            <a:pPr>
+              <a:defRPr sz="1600">
+                <a:solidFill>
+                  <a:srgbClr val="3C3C3C"/>
+                </a:solidFill>
+              </a:defRPr>
+            </a:pPr>
+            <a:r>
+              <a:t>📊 整理一週的工作狀況</a:t>
+            </a:r>
+          </a:p>
+          <a:p>
+            <a:pPr>
+              <a:defRPr sz="1600">
+                <a:solidFill>
+                  <a:srgbClr val="3C3C3C"/>
+                </a:solidFill>
+              </a:defRPr>
+            </a:pPr>
+            <a:r>
+              <a:t>📢 報告進度與問題</a:t>
+            </a:r>
+          </a:p>
+          <a:p>
+            <a:pPr>
+              <a:defRPr sz="1600">
+                <a:solidFill>
+                  <a:srgbClr val="3C3C3C"/>
+                </a:solidFill>
+              </a:defRPr>
+            </a:pPr>
+            <a:r>
+              <a:t>💬 討論解決方案</a:t>
+            </a:r>
+          </a:p>
+          <a:p>
+            <a:pPr>
+              <a:defRPr sz="1600">
+                <a:solidFill>
+                  <a:srgbClr val="3C3C3C"/>
+                </a:solidFill>
+              </a:defRPr>
+            </a:pPr>
+            <a:r>
+              <a:t>🎯 設定下週目標</a:t>
+            </a:r>
+          </a:p>
+          <a:p>
+            <a:pPr>
+              <a:defRPr sz="1600">
+                <a:solidFill>
+                  <a:srgbClr val="3C3C3C"/>
+                </a:solidFill>
+              </a:defRPr>
+            </a:pPr>
+          </a:p>
+          <a:p>
+            <a:pPr>
+              <a:defRPr sz="1600">
+                <a:solidFill>
+                  <a:srgbClr val="3C3C3C"/>
+                </a:solidFill>
+              </a:defRPr>
+            </a:pPr>
+            <a:r>
+              <a:t>日常溝通方式：</a:t>
+            </a:r>
+          </a:p>
+          <a:p>
+            <a:pPr>
+              <a:defRPr sz="1600">
+                <a:solidFill>
+                  <a:srgbClr val="3C3C3C"/>
+                </a:solidFill>
+              </a:defRPr>
+            </a:pPr>
+            <a:r>
+              <a:t>✅ 群組即時討論（快速決策）</a:t>
+            </a:r>
+          </a:p>
+          <a:p>
+            <a:pPr>
+              <a:defRPr sz="1600">
+                <a:solidFill>
+                  <a:srgbClr val="3C3C3C"/>
+                </a:solidFill>
+              </a:defRPr>
+            </a:pPr>
+            <a:r>
+              <a:t>✅ 重要事項即時宣布</a:t>
+            </a:r>
+          </a:p>
+          <a:p>
+            <a:pPr>
+              <a:defRPr sz="1600">
+                <a:solidFill>
+                  <a:srgbClr val="3C3C3C"/>
+                </a:solidFill>
+              </a:defRPr>
+            </a:pPr>
+            <a:r>
+              <a:t>⚠️ 重要事項開會需再重複一次</a:t>
+            </a:r>
+          </a:p>
+          <a:p>
+            <a:pPr>
+              <a:defRPr sz="1600">
+                <a:solidFill>
+                  <a:srgbClr val="3C3C3C"/>
+                </a:solidFill>
+              </a:defRPr>
+            </a:pPr>
+            <a:r>
+              <a:t>🎯 確保所有人都吸收到訊息</a:t>
             </a:r>
           </a:p>
         </p:txBody>
@@ -3399,50 +3480,50 @@
           <a:noFill/>
         </p:spPr>
         <p:txBody>
+          <a:bodyPr wrap="none">
+            <a:spAutoFit/>
+          </a:bodyPr>
+          <a:lstStyle/>
+          <a:p>
+            <a:pPr>
+              <a:defRPr sz="3200" b="1">
+                <a:solidFill>
+                  <a:srgbClr val="2C3E50"/>
+                </a:solidFill>
+              </a:defRPr>
+            </a:pPr>
+            <a:r>
+              <a:t>💰 薪資福利制度</a:t>
+            </a:r>
+          </a:p>
+        </p:txBody>
+      </p:sp>
+      <p:sp>
+        <p:nvSpPr>
+          <p:cNvPr id="3" name="TextBox 2"/>
+          <p:cNvSpPr txBox="1"/>
+          <p:nvPr/>
+        </p:nvSpPr>
+        <p:spPr>
+          <a:xfrm>
+            <a:off x="1371600" y="1371600"/>
+            <a:ext cx="6400800" cy="5029200"/>
+          </a:xfrm>
+          <a:prstGeom prst="rect">
+            <a:avLst/>
+          </a:prstGeom>
+          <a:noFill/>
+        </p:spPr>
+        <p:txBody>
           <a:bodyPr wrap="square">
             <a:spAutoFit/>
           </a:bodyPr>
           <a:lstStyle/>
           <a:p>
-            <a:pPr algn="l">
-              <a:defRPr sz="3200" b="1">
-                <a:solidFill>
-                  <a:srgbClr val="2C3E50"/>
-                </a:solidFill>
-              </a:defRPr>
-            </a:pPr>
-            <a:r>
-              <a:t>💰 薪資福利制度</a:t>
-            </a:r>
-          </a:p>
-        </p:txBody>
-      </p:sp>
-      <p:sp>
-        <p:nvSpPr>
-          <p:cNvPr id="3" name="TextBox 2"/>
-          <p:cNvSpPr txBox="1"/>
-          <p:nvPr/>
-        </p:nvSpPr>
-        <p:spPr>
-          <a:xfrm>
-            <a:off x="1371600" y="1371600"/>
-            <a:ext cx="6400800" cy="5029200"/>
-          </a:xfrm>
-          <a:prstGeom prst="rect">
-            <a:avLst/>
-          </a:prstGeom>
-          <a:noFill/>
-        </p:spPr>
-        <p:txBody>
-          <a:bodyPr wrap="square">
-            <a:spAutoFit/>
-          </a:bodyPr>
-          <a:lstStyle/>
-          <a:p>
-            <a:pPr>
-              <a:defRPr sz="1400">
-                <a:solidFill>
-                  <a:srgbClr val="505050"/>
+            <a:pPr>
+              <a:defRPr sz="1400">
+                <a:solidFill>
+                  <a:srgbClr val="3C3C3C"/>
                 </a:solidFill>
               </a:defRPr>
             </a:pPr>
@@ -3454,7 +3535,7 @@
             <a:pPr>
               <a:defRPr sz="1400">
                 <a:solidFill>
-                  <a:srgbClr val="505050"/>
+                  <a:srgbClr val="3C3C3C"/>
                 </a:solidFill>
               </a:defRPr>
             </a:pPr>
@@ -3466,7 +3547,7 @@
             <a:pPr>
               <a:defRPr sz="1400">
                 <a:solidFill>
-                  <a:srgbClr val="505050"/>
+                  <a:srgbClr val="3C3C3C"/>
                 </a:solidFill>
               </a:defRPr>
             </a:pPr>
@@ -3478,7 +3559,7 @@
             <a:pPr>
               <a:defRPr sz="1400">
                 <a:solidFill>
-                  <a:srgbClr val="505050"/>
+                  <a:srgbClr val="3C3C3C"/>
                 </a:solidFill>
               </a:defRPr>
             </a:pPr>
@@ -3490,7 +3571,7 @@
             <a:pPr>
               <a:defRPr sz="1400">
                 <a:solidFill>
-                  <a:srgbClr val="505050"/>
+                  <a:srgbClr val="3C3C3C"/>
                 </a:solidFill>
               </a:defRPr>
             </a:pPr>
@@ -3502,7 +3583,7 @@
             <a:pPr>
               <a:defRPr sz="1400">
                 <a:solidFill>
-                  <a:srgbClr val="505050"/>
+                  <a:srgbClr val="3C3C3C"/>
                 </a:solidFill>
               </a:defRPr>
             </a:pPr>
@@ -3514,16 +3595,16 @@
             <a:pPr>
               <a:defRPr sz="1400">
                 <a:solidFill>
-                  <a:srgbClr val="505050"/>
-                </a:solidFill>
-              </a:defRPr>
-            </a:pPr>
-          </a:p>
-          <a:p>
-            <a:pPr>
-              <a:defRPr sz="1400">
-                <a:solidFill>
-                  <a:srgbClr val="505050"/>
+                  <a:srgbClr val="3C3C3C"/>
+                </a:solidFill>
+              </a:defRPr>
+            </a:pPr>
+          </a:p>
+          <a:p>
+            <a:pPr>
+              <a:defRPr sz="1400">
+                <a:solidFill>
+                  <a:srgbClr val="3C3C3C"/>
                 </a:solidFill>
               </a:defRPr>
             </a:pPr>
@@ -3535,7 +3616,7 @@
             <a:pPr>
               <a:defRPr sz="1400">
                 <a:solidFill>
-                  <a:srgbClr val="505050"/>
+                  <a:srgbClr val="3C3C3C"/>
                 </a:solidFill>
               </a:defRPr>
             </a:pPr>
@@ -3547,16 +3628,16 @@
             <a:pPr>
               <a:defRPr sz="1400">
                 <a:solidFill>
-                  <a:srgbClr val="505050"/>
-                </a:solidFill>
-              </a:defRPr>
-            </a:pPr>
-          </a:p>
-          <a:p>
-            <a:pPr>
-              <a:defRPr sz="1400">
-                <a:solidFill>
-                  <a:srgbClr val="505050"/>
+                  <a:srgbClr val="3C3C3C"/>
+                </a:solidFill>
+              </a:defRPr>
+            </a:pPr>
+          </a:p>
+          <a:p>
+            <a:pPr>
+              <a:defRPr sz="1400">
+                <a:solidFill>
+                  <a:srgbClr val="3C3C3C"/>
                 </a:solidFill>
               </a:defRPr>
             </a:pPr>
@@ -3568,7 +3649,7 @@
             <a:pPr>
               <a:defRPr sz="1400">
                 <a:solidFill>
-                  <a:srgbClr val="505050"/>
+                  <a:srgbClr val="3C3C3C"/>
                 </a:solidFill>
               </a:defRPr>
             </a:pPr>
@@ -3580,7 +3661,7 @@
             <a:pPr>
               <a:defRPr sz="1400">
                 <a:solidFill>
-                  <a:srgbClr val="505050"/>
+                  <a:srgbClr val="3C3C3C"/>
                 </a:solidFill>
               </a:defRPr>
             </a:pPr>
@@ -3592,7 +3673,7 @@
             <a:pPr>
               <a:defRPr sz="1400">
                 <a:solidFill>
-                  <a:srgbClr val="505050"/>
+                  <a:srgbClr val="3C3C3C"/>
                 </a:solidFill>
               </a:defRPr>
             </a:pPr>
@@ -3645,34 +3726,242 @@
           <a:noFill/>
         </p:spPr>
         <p:txBody>
+          <a:bodyPr wrap="none">
+            <a:spAutoFit/>
+          </a:bodyPr>
+          <a:lstStyle/>
+          <a:p>
+            <a:pPr>
+              <a:defRPr sz="3200" b="1">
+                <a:solidFill>
+                  <a:srgbClr val="2C3E50"/>
+                </a:solidFill>
+              </a:defRPr>
+            </a:pPr>
+            <a:r>
+              <a:t>📝 請假與加班規定</a:t>
+            </a:r>
+          </a:p>
+        </p:txBody>
+      </p:sp>
+      <p:sp>
+        <p:nvSpPr>
+          <p:cNvPr id="3" name="TextBox 2"/>
+          <p:cNvSpPr txBox="1"/>
+          <p:nvPr/>
+        </p:nvSpPr>
+        <p:spPr>
+          <a:xfrm>
+            <a:off x="1371600" y="1371600"/>
+            <a:ext cx="6400800" cy="5029200"/>
+          </a:xfrm>
+          <a:prstGeom prst="rect">
+            <a:avLst/>
+          </a:prstGeom>
+          <a:noFill/>
+        </p:spPr>
+        <p:txBody>
           <a:bodyPr wrap="square">
             <a:spAutoFit/>
           </a:bodyPr>
           <a:lstStyle/>
           <a:p>
-            <a:pPr algn="l">
-              <a:defRPr sz="3200" b="1">
-                <a:solidFill>
-                  <a:srgbClr val="2C3E50"/>
-                </a:solidFill>
-              </a:defRPr>
-            </a:pPr>
-            <a:r>
-              <a:t>📝 請假與加班規定</a:t>
-            </a:r>
-          </a:p>
-        </p:txBody>
-      </p:sp>
-      <p:sp>
-        <p:nvSpPr>
-          <p:cNvPr id="3" name="TextBox 2"/>
+            <a:pPr>
+              <a:defRPr sz="1600">
+                <a:solidFill>
+                  <a:srgbClr val="3C3C3C"/>
+                </a:solidFill>
+              </a:defRPr>
+            </a:pPr>
+            <a:r>
+              <a:t>請假流程</a:t>
+            </a:r>
+          </a:p>
+          <a:p>
+            <a:pPr>
+              <a:defRPr sz="1600">
+                <a:solidFill>
+                  <a:srgbClr val="3C3C3C"/>
+                </a:solidFill>
+              </a:defRPr>
+            </a:pPr>
+            <a:r>
+              <a:t>1. 透過 LINE 向阿建申請</a:t>
+            </a:r>
+          </a:p>
+          <a:p>
+            <a:pPr>
+              <a:defRPr sz="1600">
+                <a:solidFill>
+                  <a:srgbClr val="3C3C3C"/>
+                </a:solidFill>
+              </a:defRPr>
+            </a:pPr>
+            <a:r>
+              <a:t>2. 需提前至少一天告知</a:t>
+            </a:r>
+          </a:p>
+          <a:p>
+            <a:pPr>
+              <a:defRPr sz="1600">
+                <a:solidFill>
+                  <a:srgbClr val="3C3C3C"/>
+                </a:solidFill>
+              </a:defRPr>
+            </a:pPr>
+            <a:r>
+              <a:t>3. 由阿建批准</a:t>
+            </a:r>
+          </a:p>
+          <a:p>
+            <a:pPr>
+              <a:defRPr sz="1600">
+                <a:solidFill>
+                  <a:srgbClr val="3C3C3C"/>
+                </a:solidFill>
+              </a:defRPr>
+            </a:pPr>
+            <a:r>
+              <a:t>4. 緊急狀況請電話聯絡阿建</a:t>
+            </a:r>
+          </a:p>
+          <a:p>
+            <a:pPr>
+              <a:defRPr sz="1600">
+                <a:solidFill>
+                  <a:srgbClr val="3C3C3C"/>
+                </a:solidFill>
+              </a:defRPr>
+            </a:pPr>
+          </a:p>
+          <a:p>
+            <a:pPr>
+              <a:defRPr sz="1600">
+                <a:solidFill>
+                  <a:srgbClr val="3C3C3C"/>
+                </a:solidFill>
+              </a:defRPr>
+            </a:pPr>
+            <a:r>
+              <a:t>加班規定</a:t>
+            </a:r>
+          </a:p>
+          <a:p>
+            <a:pPr>
+              <a:defRPr sz="1600">
+                <a:solidFill>
+                  <a:srgbClr val="3C3C3C"/>
+                </a:solidFill>
+              </a:defRPr>
+            </a:pPr>
+            <a:r>
+              <a:t>⏰ 加班費計算：依勞基法規定</a:t>
+            </a:r>
+          </a:p>
+          <a:p>
+            <a:pPr>
+              <a:defRPr sz="1600">
+                <a:solidFill>
+                  <a:srgbClr val="3C3C3C"/>
+                </a:solidFill>
+              </a:defRPr>
+            </a:pPr>
+            <a:r>
+              <a:t>🔄 補休規則：主管同意後執行</a:t>
+            </a:r>
+          </a:p>
+        </p:txBody>
+      </p:sp>
+      <p:sp>
+        <p:nvSpPr>
+          <p:cNvPr id="4" name="Rectangle 3"/>
+          <p:cNvSpPr/>
+          <p:nvPr/>
+        </p:nvSpPr>
+        <p:spPr>
+          <a:xfrm>
+            <a:off x="1371600" y="4754880"/>
+            <a:ext cx="6400800" cy="914400"/>
+          </a:xfrm>
+          <a:prstGeom prst="rect">
+            <a:avLst/>
+          </a:prstGeom>
+          <a:solidFill>
+            <a:srgbClr val="FFF3CD"/>
+          </a:solidFill>
+          <a:ln w="38100">
+            <a:solidFill>
+              <a:srgbClr val="FFC107"/>
+            </a:solidFill>
+          </a:ln>
+        </p:spPr>
+        <p:style>
+          <a:lnRef idx="1">
+            <a:schemeClr val="accent1"/>
+          </a:lnRef>
+          <a:fillRef idx="3">
+            <a:schemeClr val="accent1"/>
+          </a:fillRef>
+          <a:effectRef idx="2">
+            <a:schemeClr val="accent1"/>
+          </a:effectRef>
+          <a:fontRef idx="minor">
+            <a:schemeClr val="lt1"/>
+          </a:fontRef>
+        </p:style>
+        <p:txBody>
+          <a:bodyPr rtlCol="0" anchor="ctr"/>
+          <a:lstStyle/>
+          <a:p>
+            <a:pPr algn="ctr"/>
+          </a:p>
+        </p:txBody>
+      </p:sp>
+      <p:sp>
+        <p:nvSpPr>
+          <p:cNvPr id="5" name="TextBox 4"/>
           <p:cNvSpPr txBox="1"/>
           <p:nvPr/>
         </p:nvSpPr>
         <p:spPr>
           <a:xfrm>
-            <a:off x="1371600" y="1371600"/>
-            <a:ext cx="6400800" cy="5029200"/>
+            <a:off x="1554480" y="4892040"/>
+            <a:ext cx="6035040" cy="365760"/>
+          </a:xfrm>
+          <a:prstGeom prst="rect">
+            <a:avLst/>
+          </a:prstGeom>
+          <a:noFill/>
+        </p:spPr>
+        <p:txBody>
+          <a:bodyPr wrap="none">
+            <a:spAutoFit/>
+          </a:bodyPr>
+          <a:lstStyle/>
+          <a:p>
+            <a:pPr>
+              <a:defRPr sz="2000" b="1">
+                <a:solidFill>
+                  <a:srgbClr val="856404"/>
+                </a:solidFill>
+              </a:defRPr>
+            </a:pPr>
+            <a:r>
+              <a:t>⚠️ 重要提醒</a:t>
+            </a:r>
+          </a:p>
+        </p:txBody>
+      </p:sp>
+      <p:sp>
+        <p:nvSpPr>
+          <p:cNvPr id="6" name="TextBox 5"/>
+          <p:cNvSpPr txBox="1"/>
+          <p:nvPr/>
+        </p:nvSpPr>
+        <p:spPr>
+          <a:xfrm>
+            <a:off x="1554480" y="5303520"/>
+            <a:ext cx="6035040" cy="228600"/>
           </a:xfrm>
           <a:prstGeom prst="rect">
             <a:avLst/>
@@ -3693,145 +3982,7 @@
               </a:defRPr>
             </a:pPr>
             <a:r>
-              <a:t>請假流程</a:t>
-            </a:r>
-          </a:p>
-          <a:p>
-            <a:pPr>
-              <a:defRPr sz="1600">
-                <a:solidFill>
-                  <a:srgbClr val="505050"/>
-                </a:solidFill>
-              </a:defRPr>
-            </a:pPr>
-            <a:r>
-              <a:t>1. 透過 LINE 向阿建申請</a:t>
-            </a:r>
-          </a:p>
-          <a:p>
-            <a:pPr>
-              <a:defRPr sz="1600">
-                <a:solidFill>
-                  <a:srgbClr val="505050"/>
-                </a:solidFill>
-              </a:defRPr>
-            </a:pPr>
-            <a:r>
-              <a:t>2. 需提前至少一天告知</a:t>
-            </a:r>
-          </a:p>
-          <a:p>
-            <a:pPr>
-              <a:defRPr sz="1600">
-                <a:solidFill>
-                  <a:srgbClr val="505050"/>
-                </a:solidFill>
-              </a:defRPr>
-            </a:pPr>
-            <a:r>
-              <a:t>3. 由阿建批准</a:t>
-            </a:r>
-          </a:p>
-          <a:p>
-            <a:pPr>
-              <a:defRPr sz="1600">
-                <a:solidFill>
-                  <a:srgbClr val="505050"/>
-                </a:solidFill>
-              </a:defRPr>
-            </a:pPr>
-            <a:r>
-              <a:t>4. 緊急狀況請電話聯絡阿建</a:t>
-            </a:r>
-          </a:p>
-          <a:p>
-            <a:pPr>
-              <a:defRPr sz="1600">
-                <a:solidFill>
-                  <a:srgbClr val="505050"/>
-                </a:solidFill>
-              </a:defRPr>
-            </a:pPr>
-          </a:p>
-          <a:p>
-            <a:pPr>
-              <a:defRPr sz="1600">
-                <a:solidFill>
-                  <a:srgbClr val="505050"/>
-                </a:solidFill>
-              </a:defRPr>
-            </a:pPr>
-            <a:r>
-              <a:t>加班規定</a:t>
-            </a:r>
-          </a:p>
-          <a:p>
-            <a:pPr>
-              <a:defRPr sz="1600">
-                <a:solidFill>
-                  <a:srgbClr val="505050"/>
-                </a:solidFill>
-              </a:defRPr>
-            </a:pPr>
-            <a:r>
-              <a:t>⏰ 加班費計算：依勞基法規定</a:t>
-            </a:r>
-          </a:p>
-          <a:p>
-            <a:pPr>
-              <a:defRPr sz="1600">
-                <a:solidFill>
-                  <a:srgbClr val="505050"/>
-                </a:solidFill>
-              </a:defRPr>
-            </a:pPr>
-            <a:r>
-              <a:t>🔄 補休規則：主管同意後執行</a:t>
-            </a:r>
-          </a:p>
-          <a:p>
-            <a:pPr>
-              <a:defRPr sz="1600">
-                <a:solidFill>
-                  <a:srgbClr val="505050"/>
-                </a:solidFill>
-              </a:defRPr>
-            </a:pPr>
-          </a:p>
-          <a:p>
-            <a:pPr>
-              <a:defRPr sz="1600">
-                <a:solidFill>
-                  <a:srgbClr val="505050"/>
-                </a:solidFill>
-              </a:defRPr>
-            </a:pPr>
-            <a:r>
-              <a:t>⚠️ 重要提醒</a:t>
-            </a:r>
-          </a:p>
-          <a:p>
-            <a:pPr>
-              <a:defRPr sz="1600">
-                <a:solidFill>
-                  <a:srgbClr val="505050"/>
-                </a:solidFill>
-              </a:defRPr>
-            </a:pPr>
-            <a:r>
-              <a:t>週會（每週二下午2:00）為固定會議</a:t>
-            </a:r>
-          </a:p>
-          <a:p>
-            <a:pPr>
-              <a:defRPr sz="1600">
-                <a:solidFill>
-                  <a:srgbClr val="505050"/>
-                </a:solidFill>
-              </a:defRPr>
-            </a:pPr>
-            <a:r>
-              <a:t>若無法參加需提前告知</a:t>
+              <a:t>週會（每週二下午 2:00）為固定會議，若無法參加需提前告知</a:t>
             </a:r>
           </a:p>
         </p:txBody>
@@ -3879,34 +4030,258 @@
           <a:noFill/>
         </p:spPr>
         <p:txBody>
+          <a:bodyPr wrap="none">
+            <a:spAutoFit/>
+          </a:bodyPr>
+          <a:lstStyle/>
+          <a:p>
+            <a:pPr>
+              <a:defRPr sz="3200" b="1">
+                <a:solidFill>
+                  <a:srgbClr val="2C3E50"/>
+                </a:solidFill>
+              </a:defRPr>
+            </a:pPr>
+            <a:r>
+              <a:t>🎯 各職位職責與 KPI</a:t>
+            </a:r>
+          </a:p>
+        </p:txBody>
+      </p:sp>
+      <p:sp>
+        <p:nvSpPr>
+          <p:cNvPr id="3" name="Rectangle 2"/>
+          <p:cNvSpPr/>
+          <p:nvPr/>
+        </p:nvSpPr>
+        <p:spPr>
+          <a:xfrm>
+            <a:off x="1371600" y="1645920"/>
+            <a:ext cx="6400800" cy="1828800"/>
+          </a:xfrm>
+          <a:prstGeom prst="rect">
+            <a:avLst/>
+          </a:prstGeom>
+          <a:solidFill>
+            <a:srgbClr val="27ACB2"/>
+          </a:solidFill>
+          <a:ln>
+            <a:noFill/>
+          </a:ln>
+        </p:spPr>
+        <p:style>
+          <a:lnRef idx="1">
+            <a:schemeClr val="accent1"/>
+          </a:lnRef>
+          <a:fillRef idx="3">
+            <a:schemeClr val="accent1"/>
+          </a:fillRef>
+          <a:effectRef idx="2">
+            <a:schemeClr val="accent1"/>
+          </a:effectRef>
+          <a:fontRef idx="minor">
+            <a:schemeClr val="lt1"/>
+          </a:fontRef>
+        </p:style>
+        <p:txBody>
+          <a:bodyPr rtlCol="0" anchor="ctr"/>
+          <a:lstStyle/>
+          <a:p>
+            <a:pPr algn="ctr"/>
+          </a:p>
+        </p:txBody>
+      </p:sp>
+      <p:sp>
+        <p:nvSpPr>
+          <p:cNvPr id="4" name="TextBox 3"/>
+          <p:cNvSpPr txBox="1"/>
+          <p:nvPr/>
+        </p:nvSpPr>
+        <p:spPr>
+          <a:xfrm>
+            <a:off x="1554480" y="1783080"/>
+            <a:ext cx="6035040" cy="365760"/>
+          </a:xfrm>
+          <a:prstGeom prst="rect">
+            <a:avLst/>
+          </a:prstGeom>
+          <a:noFill/>
+        </p:spPr>
+        <p:txBody>
+          <a:bodyPr wrap="none">
+            <a:spAutoFit/>
+          </a:bodyPr>
+          <a:lstStyle/>
+          <a:p>
+            <a:pPr>
+              <a:defRPr sz="2000" b="1">
+                <a:solidFill>
+                  <a:srgbClr val="FFFFFF"/>
+                </a:solidFill>
+              </a:defRPr>
+            </a:pPr>
+            <a:r>
+              <a:t>業務（小圓）</a:t>
+            </a:r>
+          </a:p>
+        </p:txBody>
+      </p:sp>
+      <p:sp>
+        <p:nvSpPr>
+          <p:cNvPr id="5" name="TextBox 4"/>
+          <p:cNvSpPr txBox="1"/>
+          <p:nvPr/>
+        </p:nvSpPr>
+        <p:spPr>
+          <a:xfrm>
+            <a:off x="1554480" y="2240280"/>
+            <a:ext cx="6035040" cy="1097280"/>
+          </a:xfrm>
+          <a:prstGeom prst="rect">
+            <a:avLst/>
+          </a:prstGeom>
+          <a:noFill/>
+        </p:spPr>
+        <p:txBody>
           <a:bodyPr wrap="square">
             <a:spAutoFit/>
           </a:bodyPr>
           <a:lstStyle/>
           <a:p>
-            <a:pPr algn="l">
-              <a:defRPr sz="3200" b="1">
-                <a:solidFill>
-                  <a:srgbClr val="2C3E50"/>
-                </a:solidFill>
-              </a:defRPr>
-            </a:pPr>
-            <a:r>
-              <a:t>🎯 各職位職責與 KPI</a:t>
-            </a:r>
-          </a:p>
-        </p:txBody>
-      </p:sp>
-      <p:sp>
-        <p:nvSpPr>
-          <p:cNvPr id="3" name="TextBox 2"/>
+            <a:pPr>
+              <a:defRPr sz="1600">
+                <a:solidFill>
+                  <a:srgbClr val="FFFFFF"/>
+                </a:solidFill>
+              </a:defRPr>
+            </a:pPr>
+            <a:r>
+              <a:t>日常工作：加盟諮詢接待、店家裝潢監工、</a:t>
+            </a:r>
+          </a:p>
+          <a:p>
+            <a:pPr>
+              <a:defRPr sz="1600">
+                <a:solidFill>
+                  <a:srgbClr val="FFFFFF"/>
+                </a:solidFill>
+              </a:defRPr>
+            </a:pPr>
+            <a:r>
+              <a:t>          材料訂購追蹤、客戶關係維護</a:t>
+            </a:r>
+          </a:p>
+          <a:p>
+            <a:pPr>
+              <a:defRPr sz="1600">
+                <a:solidFill>
+                  <a:srgbClr val="FFFFFF"/>
+                </a:solidFill>
+              </a:defRPr>
+            </a:pPr>
+          </a:p>
+          <a:p>
+            <a:pPr>
+              <a:defRPr sz="1600">
+                <a:solidFill>
+                  <a:srgbClr val="FFFFFF"/>
+                </a:solidFill>
+              </a:defRPr>
+            </a:pPr>
+            <a:r>
+              <a:t>KPI 指標：每季調整一次</a:t>
+            </a:r>
+          </a:p>
+        </p:txBody>
+      </p:sp>
+      <p:sp>
+        <p:nvSpPr>
+          <p:cNvPr id="6" name="Rectangle 5"/>
+          <p:cNvSpPr/>
+          <p:nvPr/>
+        </p:nvSpPr>
+        <p:spPr>
+          <a:xfrm>
+            <a:off x="1371600" y="3657600"/>
+            <a:ext cx="6400800" cy="1371600"/>
+          </a:xfrm>
+          <a:prstGeom prst="rect">
+            <a:avLst/>
+          </a:prstGeom>
+          <a:solidFill>
+            <a:srgbClr val="27ACB2"/>
+          </a:solidFill>
+          <a:ln>
+            <a:noFill/>
+          </a:ln>
+        </p:spPr>
+        <p:style>
+          <a:lnRef idx="1">
+            <a:schemeClr val="accent1"/>
+          </a:lnRef>
+          <a:fillRef idx="3">
+            <a:schemeClr val="accent1"/>
+          </a:fillRef>
+          <a:effectRef idx="2">
+            <a:schemeClr val="accent1"/>
+          </a:effectRef>
+          <a:fontRef idx="minor">
+            <a:schemeClr val="lt1"/>
+          </a:fontRef>
+        </p:style>
+        <p:txBody>
+          <a:bodyPr rtlCol="0" anchor="ctr"/>
+          <a:lstStyle/>
+          <a:p>
+            <a:pPr algn="ctr"/>
+          </a:p>
+        </p:txBody>
+      </p:sp>
+      <p:sp>
+        <p:nvSpPr>
+          <p:cNvPr id="7" name="TextBox 6"/>
           <p:cNvSpPr txBox="1"/>
           <p:nvPr/>
         </p:nvSpPr>
         <p:spPr>
           <a:xfrm>
-            <a:off x="1371600" y="1371600"/>
-            <a:ext cx="6400800" cy="5029200"/>
+            <a:off x="1554480" y="3794760"/>
+            <a:ext cx="6035040" cy="365760"/>
+          </a:xfrm>
+          <a:prstGeom prst="rect">
+            <a:avLst/>
+          </a:prstGeom>
+          <a:noFill/>
+        </p:spPr>
+        <p:txBody>
+          <a:bodyPr wrap="none">
+            <a:spAutoFit/>
+          </a:bodyPr>
+          <a:lstStyle/>
+          <a:p>
+            <a:pPr>
+              <a:defRPr sz="2000" b="1">
+                <a:solidFill>
+                  <a:srgbClr val="FFFFFF"/>
+                </a:solidFill>
+              </a:defRPr>
+            </a:pPr>
+            <a:r>
+              <a:t>會計（小兔）</a:t>
+            </a:r>
+          </a:p>
+        </p:txBody>
+      </p:sp>
+      <p:sp>
+        <p:nvSpPr>
+          <p:cNvPr id="8" name="TextBox 7"/>
+          <p:cNvSpPr txBox="1"/>
+          <p:nvPr/>
+        </p:nvSpPr>
+        <p:spPr>
+          <a:xfrm>
+            <a:off x="1554480" y="4251960"/>
+            <a:ext cx="6035040" cy="640080"/>
           </a:xfrm>
           <a:prstGeom prst="rect">
             <a:avLst/>
@@ -3920,57 +4295,30 @@
           <a:lstStyle/>
           <a:p>
             <a:pPr>
-              <a:defRPr sz="1400">
-                <a:solidFill>
-                  <a:srgbClr val="505050"/>
-                </a:solidFill>
-              </a:defRPr>
-            </a:pPr>
-            <a:r>
-              <a:t>業務（小圓）</a:t>
-            </a:r>
-          </a:p>
-          <a:p>
-            <a:pPr>
-              <a:defRPr sz="1400">
-                <a:solidFill>
-                  <a:srgbClr val="505050"/>
-                </a:solidFill>
-              </a:defRPr>
-            </a:pPr>
-            <a:r>
-              <a:t>日常工作：</a:t>
-            </a:r>
-          </a:p>
-          <a:p>
-            <a:pPr lvl="1">
-              <a:defRPr sz="1400">
-                <a:solidFill>
-                  <a:srgbClr val="505050"/>
-                </a:solidFill>
-              </a:defRPr>
-            </a:pPr>
-            <a:r>
-              <a:t>  • 加盟諮詢接待、店家裝潢監工</a:t>
-            </a:r>
-          </a:p>
-          <a:p>
-            <a:pPr lvl="1">
-              <a:defRPr sz="1400">
-                <a:solidFill>
-                  <a:srgbClr val="505050"/>
-                </a:solidFill>
-              </a:defRPr>
-            </a:pPr>
-            <a:r>
-              <a:t>  • 材料訂購追蹤、客戶關係維護</a:t>
-            </a:r>
-          </a:p>
-          <a:p>
-            <a:pPr>
-              <a:defRPr sz="1400">
-                <a:solidFill>
-                  <a:srgbClr val="505050"/>
+              <a:defRPr sz="1600">
+                <a:solidFill>
+                  <a:srgbClr val="FFFFFF"/>
+                </a:solidFill>
+              </a:defRPr>
+            </a:pPr>
+            <a:r>
+              <a:t>日常工作：帳務處理、報表製作、發票開立、薪資計算</a:t>
+            </a:r>
+          </a:p>
+          <a:p>
+            <a:pPr>
+              <a:defRPr sz="1600">
+                <a:solidFill>
+                  <a:srgbClr val="FFFFFF"/>
+                </a:solidFill>
+              </a:defRPr>
+            </a:pPr>
+          </a:p>
+          <a:p>
+            <a:pPr>
+              <a:defRPr sz="1600">
+                <a:solidFill>
+                  <a:srgbClr val="FFFFFF"/>
                 </a:solidFill>
               </a:defRPr>
             </a:pPr>
@@ -3978,89 +4326,34 @@
               <a:t>KPI 指標：每季調整一次</a:t>
             </a:r>
           </a:p>
-          <a:p>
-            <a:pPr>
-              <a:defRPr sz="1400">
-                <a:solidFill>
-                  <a:srgbClr val="505050"/>
-                </a:solidFill>
-              </a:defRPr>
-            </a:pPr>
-          </a:p>
-          <a:p>
-            <a:pPr>
-              <a:defRPr sz="1400">
-                <a:solidFill>
-                  <a:srgbClr val="505050"/>
-                </a:solidFill>
-              </a:defRPr>
-            </a:pPr>
-            <a:r>
-              <a:t>會計（小兔）</a:t>
-            </a:r>
-          </a:p>
-          <a:p>
-            <a:pPr>
-              <a:defRPr sz="1400">
-                <a:solidFill>
-                  <a:srgbClr val="505050"/>
-                </a:solidFill>
-              </a:defRPr>
-            </a:pPr>
-            <a:r>
-              <a:t>日常工作：</a:t>
-            </a:r>
-          </a:p>
-          <a:p>
-            <a:pPr lvl="1">
-              <a:defRPr sz="1400">
-                <a:solidFill>
-                  <a:srgbClr val="505050"/>
-                </a:solidFill>
-              </a:defRPr>
-            </a:pPr>
-            <a:r>
-              <a:t>  • 帳務處理、報表製作</a:t>
-            </a:r>
-          </a:p>
-          <a:p>
-            <a:pPr lvl="1">
-              <a:defRPr sz="1400">
-                <a:solidFill>
-                  <a:srgbClr val="505050"/>
-                </a:solidFill>
-              </a:defRPr>
-            </a:pPr>
-            <a:r>
-              <a:t>  • 發票開立、薪資計算</a:t>
-            </a:r>
-          </a:p>
-          <a:p>
-            <a:pPr>
-              <a:defRPr sz="1400">
-                <a:solidFill>
-                  <a:srgbClr val="505050"/>
-                </a:solidFill>
-              </a:defRPr>
-            </a:pPr>
-            <a:r>
-              <a:t>KPI 指標：每季調整一次</a:t>
-            </a:r>
-          </a:p>
-          <a:p>
-            <a:pPr>
-              <a:defRPr sz="1400">
-                <a:solidFill>
-                  <a:srgbClr val="505050"/>
-                </a:solidFill>
-              </a:defRPr>
-            </a:pPr>
-          </a:p>
-          <a:p>
-            <a:pPr>
-              <a:defRPr sz="1400">
-                <a:solidFill>
-                  <a:srgbClr val="505050"/>
+        </p:txBody>
+      </p:sp>
+      <p:sp>
+        <p:nvSpPr>
+          <p:cNvPr id="9" name="TextBox 8"/>
+          <p:cNvSpPr txBox="1"/>
+          <p:nvPr/>
+        </p:nvSpPr>
+        <p:spPr>
+          <a:xfrm>
+            <a:off x="1371600" y="5120640"/>
+            <a:ext cx="6400800" cy="365760"/>
+          </a:xfrm>
+          <a:prstGeom prst="rect">
+            <a:avLst/>
+          </a:prstGeom>
+          <a:noFill/>
+        </p:spPr>
+        <p:txBody>
+          <a:bodyPr wrap="square">
+            <a:spAutoFit/>
+          </a:bodyPr>
+          <a:lstStyle/>
+          <a:p>
+            <a:pPr algn="l">
+              <a:defRPr sz="1400" b="0">
+                <a:solidFill>
+                  <a:srgbClr val="646464"/>
                 </a:solidFill>
               </a:defRPr>
             </a:pPr>
@@ -4113,79 +4406,193 @@
           <a:noFill/>
         </p:spPr>
         <p:txBody>
+          <a:bodyPr wrap="none">
+            <a:spAutoFit/>
+          </a:bodyPr>
+          <a:lstStyle/>
+          <a:p>
+            <a:pPr>
+              <a:defRPr sz="3200" b="1">
+                <a:solidFill>
+                  <a:srgbClr val="2C3E50"/>
+                </a:solidFill>
+              </a:defRPr>
+            </a:pPr>
+            <a:r>
+              <a:t>🔧 系統操作教學</a:t>
+            </a:r>
+          </a:p>
+        </p:txBody>
+      </p:sp>
+      <p:sp>
+        <p:nvSpPr>
+          <p:cNvPr id="3" name="TextBox 2"/>
+          <p:cNvSpPr txBox="1"/>
+          <p:nvPr/>
+        </p:nvSpPr>
+        <p:spPr>
+          <a:xfrm>
+            <a:off x="1371600" y="1371600"/>
+            <a:ext cx="6400800" cy="5029200"/>
+          </a:xfrm>
+          <a:prstGeom prst="rect">
+            <a:avLst/>
+          </a:prstGeom>
+          <a:noFill/>
+        </p:spPr>
+        <p:txBody>
           <a:bodyPr wrap="square">
             <a:spAutoFit/>
           </a:bodyPr>
           <a:lstStyle/>
           <a:p>
-            <a:pPr algn="l">
-              <a:defRPr sz="3200" b="1">
-                <a:solidFill>
-                  <a:srgbClr val="2C3E50"/>
-                </a:solidFill>
-              </a:defRPr>
-            </a:pPr>
-            <a:r>
-              <a:t>🔧 系統操作教學</a:t>
-            </a:r>
-          </a:p>
-        </p:txBody>
-      </p:sp>
-      <p:sp>
-        <p:nvSpPr>
-          <p:cNvPr id="3" name="TextBox 2"/>
-          <p:cNvSpPr txBox="1"/>
-          <p:nvPr/>
-        </p:nvSpPr>
-        <p:spPr>
-          <a:xfrm>
-            <a:off x="1371600" y="1371600"/>
-            <a:ext cx="6400800" cy="5029200"/>
-          </a:xfrm>
-          <a:prstGeom prst="rect">
-            <a:avLst/>
-          </a:prstGeom>
-          <a:noFill/>
-        </p:spPr>
-        <p:txBody>
-          <a:bodyPr wrap="square">
-            <a:spAutoFit/>
-          </a:bodyPr>
-          <a:lstStyle/>
-          <a:p>
-            <a:pPr>
-              <a:defRPr sz="1600">
-                <a:solidFill>
-                  <a:srgbClr val="505050"/>
-                </a:solidFill>
-              </a:defRPr>
-            </a:pPr>
-            <a:r>
-              <a:t>內部系統：ONE桌遊管理、倉儲、AI客服、打掃</a:t>
-            </a:r>
-          </a:p>
-          <a:p>
-            <a:pPr>
-              <a:defRPr sz="1600">
-                <a:solidFill>
-                  <a:srgbClr val="505050"/>
-                </a:solidFill>
-              </a:defRPr>
-            </a:pPr>
-            <a:r>
-              <a:t>AI工具：ChatGPT/Claude、Google Workspace、LINE</a:t>
-            </a:r>
-          </a:p>
-          <a:p>
-            <a:pPr>
-              <a:defRPr sz="1600">
-                <a:solidFill>
-                  <a:srgbClr val="505050"/>
-                </a:solidFill>
-              </a:defRPr>
-            </a:pPr>
-            <a:r>
-              <a:t>帳號密碼由阿建提供</a:t>
+            <a:pPr>
+              <a:defRPr sz="1400">
+                <a:solidFill>
+                  <a:srgbClr val="3C3C3C"/>
+                </a:solidFill>
+              </a:defRPr>
+            </a:pPr>
+            <a:r>
+              <a:t>內部系統</a:t>
+            </a:r>
+          </a:p>
+          <a:p>
+            <a:pPr>
+              <a:defRPr sz="1400">
+                <a:solidFill>
+                  <a:srgbClr val="3C3C3C"/>
+                </a:solidFill>
+              </a:defRPr>
+            </a:pPr>
+            <a:r>
+              <a:t>🏪 ONE桌遊管理系統 - 店家管理、訂單、會員</a:t>
+            </a:r>
+          </a:p>
+          <a:p>
+            <a:pPr>
+              <a:defRPr sz="1400">
+                <a:solidFill>
+                  <a:srgbClr val="3C3C3C"/>
+                </a:solidFill>
+              </a:defRPr>
+            </a:pPr>
+            <a:r>
+              <a:t>📦 倉儲管理系統 - 庫存、進出貨</a:t>
+            </a:r>
+          </a:p>
+          <a:p>
+            <a:pPr>
+              <a:defRPr sz="1400">
+                <a:solidFill>
+                  <a:srgbClr val="3C3C3C"/>
+                </a:solidFill>
+              </a:defRPr>
+            </a:pPr>
+            <a:r>
+              <a:t>🤖 AI 客服系統 - 自動回覆、問題分類</a:t>
+            </a:r>
+          </a:p>
+          <a:p>
+            <a:pPr>
+              <a:defRPr sz="1400">
+                <a:solidFill>
+                  <a:srgbClr val="3C3C3C"/>
+                </a:solidFill>
+              </a:defRPr>
+            </a:pPr>
+            <a:r>
+              <a:t>🧹 打掃系統 - 任務派發、進度追蹤</a:t>
+            </a:r>
+          </a:p>
+          <a:p>
+            <a:pPr>
+              <a:defRPr sz="1400">
+                <a:solidFill>
+                  <a:srgbClr val="3C3C3C"/>
+                </a:solidFill>
+              </a:defRPr>
+            </a:pPr>
+          </a:p>
+          <a:p>
+            <a:pPr>
+              <a:defRPr sz="1400">
+                <a:solidFill>
+                  <a:srgbClr val="3C3C3C"/>
+                </a:solidFill>
+              </a:defRPr>
+            </a:pPr>
+            <a:r>
+              <a:t>AI 工具輔助</a:t>
+            </a:r>
+          </a:p>
+          <a:p>
+            <a:pPr>
+              <a:defRPr sz="1400">
+                <a:solidFill>
+                  <a:srgbClr val="3C3C3C"/>
+                </a:solidFill>
+              </a:defRPr>
+            </a:pPr>
+            <a:r>
+              <a:t>💬 ChatGPT / Claude - 資料整理、文案撰寫</a:t>
+            </a:r>
+          </a:p>
+          <a:p>
+            <a:pPr>
+              <a:defRPr sz="1400">
+                <a:solidFill>
+                  <a:srgbClr val="3C3C3C"/>
+                </a:solidFill>
+              </a:defRPr>
+            </a:pPr>
+            <a:r>
+              <a:t>📄 Google Workspace - 文件協作</a:t>
+            </a:r>
+          </a:p>
+          <a:p>
+            <a:pPr>
+              <a:defRPr sz="1400">
+                <a:solidFill>
+                  <a:srgbClr val="3C3C3C"/>
+                </a:solidFill>
+              </a:defRPr>
+            </a:pPr>
+            <a:r>
+              <a:t>📱 LINE - 即時溝通</a:t>
+            </a:r>
+          </a:p>
+          <a:p>
+            <a:pPr>
+              <a:defRPr sz="1400">
+                <a:solidFill>
+                  <a:srgbClr val="3C3C3C"/>
+                </a:solidFill>
+              </a:defRPr>
+            </a:pPr>
+            <a:r>
+              <a:t>💻 GitHub - 程式碼管理（技術團隊）</a:t>
+            </a:r>
+          </a:p>
+          <a:p>
+            <a:pPr>
+              <a:defRPr sz="1400">
+                <a:solidFill>
+                  <a:srgbClr val="3C3C3C"/>
+                </a:solidFill>
+              </a:defRPr>
+            </a:pPr>
+          </a:p>
+          <a:p>
+            <a:pPr>
+              <a:defRPr sz="1400">
+                <a:solidFill>
+                  <a:srgbClr val="3C3C3C"/>
+                </a:solidFill>
+              </a:defRPr>
+            </a:pPr>
+            <a:r>
+              <a:t>💡 帳號密碼由阿建提供，操作手冊將由阿建提供</a:t>
             </a:r>
           </a:p>
         </p:txBody>
@@ -4233,91 +4640,160 @@
           <a:noFill/>
         </p:spPr>
         <p:txBody>
+          <a:bodyPr wrap="none">
+            <a:spAutoFit/>
+          </a:bodyPr>
+          <a:lstStyle/>
+          <a:p>
+            <a:pPr>
+              <a:defRPr sz="3200" b="1">
+                <a:solidFill>
+                  <a:srgbClr val="2C3E50"/>
+                </a:solidFill>
+              </a:defRPr>
+            </a:pPr>
+            <a:r>
+              <a:t>🚨 緊急處理流程</a:t>
+            </a:r>
+          </a:p>
+        </p:txBody>
+      </p:sp>
+      <p:sp>
+        <p:nvSpPr>
+          <p:cNvPr id="3" name="TextBox 2"/>
+          <p:cNvSpPr txBox="1"/>
+          <p:nvPr/>
+        </p:nvSpPr>
+        <p:spPr>
+          <a:xfrm>
+            <a:off x="1371600" y="1371600"/>
+            <a:ext cx="6400800" cy="5029200"/>
+          </a:xfrm>
+          <a:prstGeom prst="rect">
+            <a:avLst/>
+          </a:prstGeom>
+          <a:noFill/>
+        </p:spPr>
+        <p:txBody>
           <a:bodyPr wrap="square">
             <a:spAutoFit/>
           </a:bodyPr>
           <a:lstStyle/>
           <a:p>
-            <a:pPr algn="l">
-              <a:defRPr sz="3200" b="1">
-                <a:solidFill>
-                  <a:srgbClr val="2C3E50"/>
-                </a:solidFill>
-              </a:defRPr>
-            </a:pPr>
-            <a:r>
-              <a:t>🚨 緊急處理流程</a:t>
-            </a:r>
-          </a:p>
-        </p:txBody>
-      </p:sp>
-      <p:sp>
-        <p:nvSpPr>
-          <p:cNvPr id="3" name="TextBox 2"/>
-          <p:cNvSpPr txBox="1"/>
-          <p:nvPr/>
-        </p:nvSpPr>
-        <p:spPr>
-          <a:xfrm>
-            <a:off x="1371600" y="1371600"/>
-            <a:ext cx="6400800" cy="5029200"/>
-          </a:xfrm>
-          <a:prstGeom prst="rect">
-            <a:avLst/>
-          </a:prstGeom>
-          <a:noFill/>
-        </p:spPr>
-        <p:txBody>
-          <a:bodyPr wrap="square">
-            <a:spAutoFit/>
-          </a:bodyPr>
-          <a:lstStyle/>
-          <a:p>
-            <a:pPr>
-              <a:defRPr sz="1600">
-                <a:solidFill>
-                  <a:srgbClr val="505050"/>
-                </a:solidFill>
-              </a:defRPr>
-            </a:pPr>
-            <a:r>
-              <a:t>店家緊急狀況：門鎖故障、設備故障、客訴</a:t>
-            </a:r>
-          </a:p>
-          <a:p>
-            <a:pPr>
-              <a:defRPr sz="1600">
-                <a:solidFill>
-                  <a:srgbClr val="505050"/>
-                </a:solidFill>
-              </a:defRPr>
-            </a:pPr>
-            <a:r>
-              <a:t>聯絡人：</a:t>
+            <a:pPr>
+              <a:defRPr sz="1400">
+                <a:solidFill>
+                  <a:srgbClr val="3C3C3C"/>
+                </a:solidFill>
+              </a:defRPr>
+            </a:pPr>
+            <a:r>
+              <a:t>店家緊急狀況</a:t>
             </a:r>
           </a:p>
           <a:p>
             <a:pPr lvl="1">
-              <a:defRPr sz="1600">
-                <a:solidFill>
-                  <a:srgbClr val="505050"/>
-                </a:solidFill>
-              </a:defRPr>
-            </a:pPr>
-            <a:r>
-              <a:t>  林建宏（阿建）0975-170-840</a:t>
+              <a:defRPr sz="1400">
+                <a:solidFill>
+                  <a:srgbClr val="3C3C3C"/>
+                </a:solidFill>
+              </a:defRPr>
+            </a:pPr>
+            <a:r>
+              <a:t>• 門鎖故障（客戶鎖在裡面）→ 安撫客戶 → 遠端開鎖 → 通知業務</a:t>
             </a:r>
           </a:p>
           <a:p>
             <a:pPr lvl="1">
-              <a:defRPr sz="1600">
-                <a:solidFill>
-                  <a:srgbClr val="505050"/>
-                </a:solidFill>
-              </a:defRPr>
-            </a:pPr>
-            <a:r>
-              <a:t>  林建佑 0920-119-696</a:t>
+              <a:defRPr sz="1400">
+                <a:solidFill>
+                  <a:srgbClr val="3C3C3C"/>
+                </a:solidFill>
+              </a:defRPr>
+            </a:pPr>
+            <a:r>
+              <a:t>• 設備故障（麻將桌、冷氣）→ 記錄問題 → 通知業務 → 派工維修</a:t>
+            </a:r>
+          </a:p>
+          <a:p>
+            <a:pPr lvl="1">
+              <a:defRPr sz="1400">
+                <a:solidFill>
+                  <a:srgbClr val="3C3C3C"/>
+                </a:solidFill>
+              </a:defRPr>
+            </a:pPr>
+            <a:r>
+              <a:t>• 客訴處理（鄰居噪音等）→ 了解情況 → 安撫客戶 → 通報主管</a:t>
+            </a:r>
+          </a:p>
+          <a:p>
+            <a:pPr lvl="1">
+              <a:defRPr sz="1400">
+                <a:solidFill>
+                  <a:srgbClr val="3C3C3C"/>
+                </a:solidFill>
+              </a:defRPr>
+            </a:pPr>
+            <a:r>
+              <a:t>• 系統當機 → 確認範圍 → 通知技術 → 暫用備案</a:t>
+            </a:r>
+          </a:p>
+          <a:p>
+            <a:pPr>
+              <a:defRPr sz="1400">
+                <a:solidFill>
+                  <a:srgbClr val="3C3C3C"/>
+                </a:solidFill>
+              </a:defRPr>
+            </a:pPr>
+          </a:p>
+          <a:p>
+            <a:pPr>
+              <a:defRPr sz="1400">
+                <a:solidFill>
+                  <a:srgbClr val="3C3C3C"/>
+                </a:solidFill>
+              </a:defRPr>
+            </a:pPr>
+            <a:r>
+              <a:t>⚠️ 緊急聯絡人</a:t>
+            </a:r>
+          </a:p>
+          <a:p>
+            <a:pPr>
+              <a:defRPr sz="1400">
+                <a:solidFill>
+                  <a:srgbClr val="3C3C3C"/>
+                </a:solidFill>
+              </a:defRPr>
+            </a:pPr>
+            <a:r>
+              <a:t>林建宏（阿建）總經理 - 0975-170-840</a:t>
+            </a:r>
+          </a:p>
+          <a:p>
+            <a:pPr>
+              <a:defRPr sz="1400">
+                <a:solidFill>
+                  <a:srgbClr val="3C3C3C"/>
+                </a:solidFill>
+              </a:defRPr>
+            </a:pPr>
+            <a:r>
+              <a:t>林建佑（負責人）- 0920-119-696</a:t>
+            </a:r>
+          </a:p>
+          <a:p>
+            <a:pPr>
+              <a:defRPr sz="1400">
+                <a:solidFill>
+                  <a:srgbClr val="3C3C3C"/>
+                </a:solidFill>
+              </a:defRPr>
+            </a:pPr>
+            <a:r>
+              <a:t>技術支援 - 阿建 0975-170-840</a:t>
             </a:r>
           </a:p>
         </p:txBody>
@@ -4365,103 +4841,223 @@
           <a:noFill/>
         </p:spPr>
         <p:txBody>
+          <a:bodyPr wrap="none">
+            <a:spAutoFit/>
+          </a:bodyPr>
+          <a:lstStyle/>
+          <a:p>
+            <a:pPr>
+              <a:defRPr sz="3200" b="1">
+                <a:solidFill>
+                  <a:srgbClr val="2C3E50"/>
+                </a:solidFill>
+              </a:defRPr>
+            </a:pPr>
+            <a:r>
+              <a:t>❓ 常見問題 FAQ</a:t>
+            </a:r>
+          </a:p>
+        </p:txBody>
+      </p:sp>
+      <p:sp>
+        <p:nvSpPr>
+          <p:cNvPr id="3" name="TextBox 2"/>
+          <p:cNvSpPr txBox="1"/>
+          <p:nvPr/>
+        </p:nvSpPr>
+        <p:spPr>
+          <a:xfrm>
+            <a:off x="1371600" y="1371600"/>
+            <a:ext cx="6400800" cy="5029200"/>
+          </a:xfrm>
+          <a:prstGeom prst="rect">
+            <a:avLst/>
+          </a:prstGeom>
+          <a:noFill/>
+        </p:spPr>
+        <p:txBody>
           <a:bodyPr wrap="square">
             <a:spAutoFit/>
           </a:bodyPr>
           <a:lstStyle/>
           <a:p>
-            <a:pPr algn="l">
-              <a:defRPr sz="3200" b="1">
-                <a:solidFill>
-                  <a:srgbClr val="2C3E50"/>
-                </a:solidFill>
-              </a:defRPr>
-            </a:pPr>
-            <a:r>
-              <a:t>❓ 常見問題 FAQ</a:t>
-            </a:r>
-          </a:p>
-        </p:txBody>
-      </p:sp>
-      <p:sp>
-        <p:nvSpPr>
-          <p:cNvPr id="3" name="TextBox 2"/>
-          <p:cNvSpPr txBox="1"/>
-          <p:nvPr/>
-        </p:nvSpPr>
-        <p:spPr>
-          <a:xfrm>
-            <a:off x="1371600" y="1371600"/>
-            <a:ext cx="6400800" cy="5029200"/>
-          </a:xfrm>
-          <a:prstGeom prst="rect">
-            <a:avLst/>
-          </a:prstGeom>
-          <a:noFill/>
-        </p:spPr>
-        <p:txBody>
-          <a:bodyPr wrap="square">
-            <a:spAutoFit/>
-          </a:bodyPr>
-          <a:lstStyle/>
-          <a:p>
-            <a:pPr>
-              <a:defRPr sz="1600">
-                <a:solidFill>
-                  <a:srgbClr val="505050"/>
-                </a:solidFill>
-              </a:defRPr>
-            </a:pPr>
-            <a:r>
-              <a:t>Q: 忘記打卡？A: 立即LINE通知阿建補登</a:t>
-            </a:r>
-          </a:p>
-          <a:p>
-            <a:pPr>
-              <a:defRPr sz="1600">
-                <a:solidFill>
-                  <a:srgbClr val="505050"/>
-                </a:solidFill>
-              </a:defRPr>
-            </a:pPr>
-            <a:r>
-              <a:t>Q: 臨時請假？A: LINE阿建，提前一天</a:t>
-            </a:r>
-          </a:p>
-          <a:p>
-            <a:pPr>
-              <a:defRPr sz="1600">
-                <a:solidFill>
-                  <a:srgbClr val="505050"/>
-                </a:solidFill>
-              </a:defRPr>
-            </a:pPr>
-            <a:r>
-              <a:t>Q: 系統登不進去？A: 找阿建</a:t>
-            </a:r>
-          </a:p>
-          <a:p>
-            <a:pPr>
-              <a:defRPr sz="1600">
-                <a:solidFill>
-                  <a:srgbClr val="505050"/>
-                </a:solidFill>
-              </a:defRPr>
-            </a:pPr>
-            <a:r>
-              <a:t>Q: 午餐提供嗎？A: 無，請自理</a:t>
-            </a:r>
-          </a:p>
-          <a:p>
-            <a:pPr>
-              <a:defRPr sz="1600">
-                <a:solidFill>
-                  <a:srgbClr val="505050"/>
-                </a:solidFill>
-              </a:defRPr>
-            </a:pPr>
-            <a:r>
-              <a:t>Q: 多久調薪？A: KPI每季調整一次</a:t>
+            <a:pPr>
+              <a:defRPr sz="1400">
+                <a:solidFill>
+                  <a:srgbClr val="3C3C3C"/>
+                </a:solidFill>
+              </a:defRPr>
+            </a:pPr>
+            <a:r>
+              <a:t>關於工作</a:t>
+            </a:r>
+          </a:p>
+          <a:p>
+            <a:pPr>
+              <a:defRPr sz="1400">
+                <a:solidFill>
+                  <a:srgbClr val="3C3C3C"/>
+                </a:solidFill>
+              </a:defRPr>
+            </a:pPr>
+            <a:r>
+              <a:t>Q: 忘記打卡怎麼辦？</a:t>
+            </a:r>
+          </a:p>
+          <a:p>
+            <a:pPr>
+              <a:defRPr sz="1400">
+                <a:solidFill>
+                  <a:srgbClr val="3C3C3C"/>
+                </a:solidFill>
+              </a:defRPr>
+            </a:pPr>
+            <a:r>
+              <a:t>A: 立即 LINE 通知阿建補登</a:t>
+            </a:r>
+          </a:p>
+          <a:p>
+            <a:pPr>
+              <a:defRPr sz="1400">
+                <a:solidFill>
+                  <a:srgbClr val="3C3C3C"/>
+                </a:solidFill>
+              </a:defRPr>
+            </a:pPr>
+          </a:p>
+          <a:p>
+            <a:pPr>
+              <a:defRPr sz="1400">
+                <a:solidFill>
+                  <a:srgbClr val="3C3C3C"/>
+                </a:solidFill>
+              </a:defRPr>
+            </a:pPr>
+            <a:r>
+              <a:t>Q: 臨時請假要找誰？</a:t>
+            </a:r>
+          </a:p>
+          <a:p>
+            <a:pPr>
+              <a:defRPr sz="1400">
+                <a:solidFill>
+                  <a:srgbClr val="3C3C3C"/>
+                </a:solidFill>
+              </a:defRPr>
+            </a:pPr>
+            <a:r>
+              <a:t>A: LINE 向阿建申請，提前一天告知</a:t>
+            </a:r>
+          </a:p>
+          <a:p>
+            <a:pPr>
+              <a:defRPr sz="1400">
+                <a:solidFill>
+                  <a:srgbClr val="3C3C3C"/>
+                </a:solidFill>
+              </a:defRPr>
+            </a:pPr>
+          </a:p>
+          <a:p>
+            <a:pPr>
+              <a:defRPr sz="1400">
+                <a:solidFill>
+                  <a:srgbClr val="3C3C3C"/>
+                </a:solidFill>
+              </a:defRPr>
+            </a:pPr>
+            <a:r>
+              <a:t>關於公司</a:t>
+            </a:r>
+          </a:p>
+          <a:p>
+            <a:pPr>
+              <a:defRPr sz="1400">
+                <a:solidFill>
+                  <a:srgbClr val="3C3C3C"/>
+                </a:solidFill>
+              </a:defRPr>
+            </a:pPr>
+            <a:r>
+              <a:t>Q: 午餐公司有提供嗎？</a:t>
+            </a:r>
+          </a:p>
+          <a:p>
+            <a:pPr>
+              <a:defRPr sz="1400">
+                <a:solidFill>
+                  <a:srgbClr val="3C3C3C"/>
+                </a:solidFill>
+              </a:defRPr>
+            </a:pPr>
+            <a:r>
+              <a:t>A: 無，請自理</a:t>
+            </a:r>
+          </a:p>
+          <a:p>
+            <a:pPr>
+              <a:defRPr sz="1400">
+                <a:solidFill>
+                  <a:srgbClr val="3C3C3C"/>
+                </a:solidFill>
+              </a:defRPr>
+            </a:pPr>
+          </a:p>
+          <a:p>
+            <a:pPr>
+              <a:defRPr sz="1400">
+                <a:solidFill>
+                  <a:srgbClr val="3C3C3C"/>
+                </a:solidFill>
+              </a:defRPr>
+            </a:pPr>
+            <a:r>
+              <a:t>Q: 可以在家工作嗎？</a:t>
+            </a:r>
+          </a:p>
+          <a:p>
+            <a:pPr>
+              <a:defRPr sz="1400">
+                <a:solidFill>
+                  <a:srgbClr val="3C3C3C"/>
+                </a:solidFill>
+              </a:defRPr>
+            </a:pPr>
+            <a:r>
+              <a:t>A: 目前須到辦公室上班</a:t>
+            </a:r>
+          </a:p>
+          <a:p>
+            <a:pPr>
+              <a:defRPr sz="1400">
+                <a:solidFill>
+                  <a:srgbClr val="3C3C3C"/>
+                </a:solidFill>
+              </a:defRPr>
+            </a:pPr>
+          </a:p>
+          <a:p>
+            <a:pPr>
+              <a:defRPr sz="1400">
+                <a:solidFill>
+                  <a:srgbClr val="3C3C3C"/>
+                </a:solidFill>
+              </a:defRPr>
+            </a:pPr>
+            <a:r>
+              <a:t>Q: 多久會調薪？</a:t>
+            </a:r>
+          </a:p>
+          <a:p>
+            <a:pPr>
+              <a:defRPr sz="1400">
+                <a:solidFill>
+                  <a:srgbClr val="3C3C3C"/>
+                </a:solidFill>
+              </a:defRPr>
+            </a:pPr>
+            <a:r>
+              <a:t>A: KPI 每季調整一次，表現優異會調整薪資</a:t>
             </a:r>
           </a:p>
         </p:txBody>
@@ -4509,91 +5105,160 @@
           <a:noFill/>
         </p:spPr>
         <p:txBody>
+          <a:bodyPr wrap="none">
+            <a:spAutoFit/>
+          </a:bodyPr>
+          <a:lstStyle/>
+          <a:p>
+            <a:pPr>
+              <a:defRPr sz="3200" b="1">
+                <a:solidFill>
+                  <a:srgbClr val="2C3E50"/>
+                </a:solidFill>
+              </a:defRPr>
+            </a:pPr>
+            <a:r>
+              <a:t>📚 成功/失敗案例分享</a:t>
+            </a:r>
+          </a:p>
+        </p:txBody>
+      </p:sp>
+      <p:sp>
+        <p:nvSpPr>
+          <p:cNvPr id="3" name="TextBox 2"/>
+          <p:cNvSpPr txBox="1"/>
+          <p:nvPr/>
+        </p:nvSpPr>
+        <p:spPr>
+          <a:xfrm>
+            <a:off x="1371600" y="1371600"/>
+            <a:ext cx="6400800" cy="5029200"/>
+          </a:xfrm>
+          <a:prstGeom prst="rect">
+            <a:avLst/>
+          </a:prstGeom>
+          <a:noFill/>
+        </p:spPr>
+        <p:txBody>
           <a:bodyPr wrap="square">
             <a:spAutoFit/>
           </a:bodyPr>
           <a:lstStyle/>
           <a:p>
-            <a:pPr algn="l">
-              <a:defRPr sz="3200" b="1">
-                <a:solidFill>
-                  <a:srgbClr val="2C3E50"/>
-                </a:solidFill>
-              </a:defRPr>
-            </a:pPr>
-            <a:r>
-              <a:t>📚 成功/失敗案例</a:t>
-            </a:r>
-          </a:p>
-        </p:txBody>
-      </p:sp>
-      <p:sp>
-        <p:nvSpPr>
-          <p:cNvPr id="3" name="TextBox 2"/>
-          <p:cNvSpPr txBox="1"/>
-          <p:nvPr/>
-        </p:nvSpPr>
-        <p:spPr>
-          <a:xfrm>
-            <a:off x="1371600" y="1371600"/>
-            <a:ext cx="6400800" cy="5029200"/>
-          </a:xfrm>
-          <a:prstGeom prst="rect">
-            <a:avLst/>
-          </a:prstGeom>
-          <a:noFill/>
-        </p:spPr>
-        <p:txBody>
-          <a:bodyPr wrap="square">
-            <a:spAutoFit/>
-          </a:bodyPr>
-          <a:lstStyle/>
-          <a:p>
-            <a:pPr>
-              <a:defRPr sz="1600">
-                <a:solidFill>
-                  <a:srgbClr val="505050"/>
-                </a:solidFill>
-              </a:defRPr>
-            </a:pPr>
-            <a:r>
-              <a:t>✅ 善用AI工具提升效率</a:t>
-            </a:r>
-          </a:p>
-          <a:p>
-            <a:pPr>
-              <a:defRPr sz="1600">
-                <a:solidFill>
-                  <a:srgbClr val="505050"/>
-                </a:solidFill>
-              </a:defRPr>
-            </a:pPr>
-            <a:r>
-              <a:t>✅ 主動發現問題省成本</a:t>
-            </a:r>
-          </a:p>
-          <a:p>
-            <a:pPr>
-              <a:defRPr sz="1600">
-                <a:solidFill>
-                  <a:srgbClr val="505050"/>
-                </a:solidFill>
-              </a:defRPr>
-            </a:pPr>
-            <a:r>
-              <a:t>❌ 說「我不會」導致延誤</a:t>
-            </a:r>
-          </a:p>
-          <a:p>
-            <a:pPr>
-              <a:defRPr sz="1600">
-                <a:solidFill>
-                  <a:srgbClr val="505050"/>
-                </a:solidFill>
-              </a:defRPr>
-            </a:pPr>
-            <a:r>
-              <a:t>❌ 溝通不確實導致誤會</a:t>
+            <a:pPr>
+              <a:defRPr sz="1400">
+                <a:solidFill>
+                  <a:srgbClr val="3C3C3C"/>
+                </a:solidFill>
+              </a:defRPr>
+            </a:pPr>
+            <a:r>
+              <a:t>✅ 成功案例：善用 AI 工具</a:t>
+            </a:r>
+          </a:p>
+          <a:p>
+            <a:pPr>
+              <a:defRPr sz="1400">
+                <a:solidFill>
+                  <a:srgbClr val="3C3C3C"/>
+                </a:solidFill>
+              </a:defRPr>
+            </a:pPr>
+            <a:r>
+              <a:t>情境：整理 100 家店的營收報表</a:t>
+            </a:r>
+          </a:p>
+          <a:p>
+            <a:pPr>
+              <a:defRPr sz="1400">
+                <a:solidFill>
+                  <a:srgbClr val="3C3C3C"/>
+                </a:solidFill>
+              </a:defRPr>
+            </a:pPr>
+            <a:r>
+              <a:t>傳統做法：手動 Excel，需要 7 天</a:t>
+            </a:r>
+          </a:p>
+          <a:p>
+            <a:pPr>
+              <a:defRPr sz="1400">
+                <a:solidFill>
+                  <a:srgbClr val="3C3C3C"/>
+                </a:solidFill>
+              </a:defRPr>
+            </a:pPr>
+            <a:r>
+              <a:t>AI 做法：用 Claude 寫腳本，3 天完成</a:t>
+            </a:r>
+          </a:p>
+          <a:p>
+            <a:pPr>
+              <a:defRPr sz="1400">
+                <a:solidFill>
+                  <a:srgbClr val="3C3C3C"/>
+                </a:solidFill>
+              </a:defRPr>
+            </a:pPr>
+            <a:r>
+              <a:t>學到：善用工具可大幅提升效率</a:t>
+            </a:r>
+          </a:p>
+          <a:p>
+            <a:pPr>
+              <a:defRPr sz="1400">
+                <a:solidFill>
+                  <a:srgbClr val="3C3C3C"/>
+                </a:solidFill>
+              </a:defRPr>
+            </a:pPr>
+          </a:p>
+          <a:p>
+            <a:pPr>
+              <a:defRPr sz="1400">
+                <a:solidFill>
+                  <a:srgbClr val="3C3C3C"/>
+                </a:solidFill>
+              </a:defRPr>
+            </a:pPr>
+            <a:r>
+              <a:t>❌ 失敗案例：說「我不會」導致延誤</a:t>
+            </a:r>
+          </a:p>
+          <a:p>
+            <a:pPr>
+              <a:defRPr sz="1400">
+                <a:solidFill>
+                  <a:srgbClr val="3C3C3C"/>
+                </a:solidFill>
+              </a:defRPr>
+            </a:pPr>
+            <a:r>
+              <a:t>情境：收到任務直接說不會，等主管教</a:t>
+            </a:r>
+          </a:p>
+          <a:p>
+            <a:pPr>
+              <a:defRPr sz="1400">
+                <a:solidFill>
+                  <a:srgbClr val="3C3C3C"/>
+                </a:solidFill>
+              </a:defRPr>
+            </a:pPr>
+            <a:r>
+              <a:t>結果：錯過截止日，影響整個專案</a:t>
+            </a:r>
+          </a:p>
+          <a:p>
+            <a:pPr>
+              <a:defRPr sz="1400">
+                <a:solidFill>
+                  <a:srgbClr val="3C3C3C"/>
+                </a:solidFill>
+              </a:defRPr>
+            </a:pPr>
+            <a:r>
+              <a:t>教訓：先嘗試用 AI/Google 找答案</a:t>
             </a:r>
           </a:p>
         </p:txBody>
@@ -4641,62 +5306,62 @@
           <a:noFill/>
         </p:spPr>
         <p:txBody>
+          <a:bodyPr wrap="none">
+            <a:spAutoFit/>
+          </a:bodyPr>
+          <a:lstStyle/>
+          <a:p>
+            <a:pPr>
+              <a:defRPr sz="3200" b="1">
+                <a:solidFill>
+                  <a:srgbClr val="2C3E50"/>
+                </a:solidFill>
+              </a:defRPr>
+            </a:pPr>
+            <a:r>
+              <a:t>🌟 公司願景與目標</a:t>
+            </a:r>
+          </a:p>
+        </p:txBody>
+      </p:sp>
+      <p:sp>
+        <p:nvSpPr>
+          <p:cNvPr id="3" name="TextBox 2"/>
+          <p:cNvSpPr txBox="1"/>
+          <p:nvPr/>
+        </p:nvSpPr>
+        <p:spPr>
+          <a:xfrm>
+            <a:off x="1371600" y="1371600"/>
+            <a:ext cx="6400800" cy="5029200"/>
+          </a:xfrm>
+          <a:prstGeom prst="rect">
+            <a:avLst/>
+          </a:prstGeom>
+          <a:noFill/>
+        </p:spPr>
+        <p:txBody>
           <a:bodyPr wrap="square">
             <a:spAutoFit/>
           </a:bodyPr>
           <a:lstStyle/>
           <a:p>
-            <a:pPr algn="l">
-              <a:defRPr sz="3200" b="1">
-                <a:solidFill>
-                  <a:srgbClr val="2C3E50"/>
-                </a:solidFill>
-              </a:defRPr>
-            </a:pPr>
-            <a:r>
-              <a:t>🌟 公司願景與目標</a:t>
-            </a:r>
-          </a:p>
-        </p:txBody>
-      </p:sp>
-      <p:sp>
-        <p:nvSpPr>
-          <p:cNvPr id="3" name="TextBox 2"/>
-          <p:cNvSpPr txBox="1"/>
-          <p:nvPr/>
-        </p:nvSpPr>
-        <p:spPr>
-          <a:xfrm>
-            <a:off x="1371600" y="1371600"/>
-            <a:ext cx="6400800" cy="5029200"/>
-          </a:xfrm>
-          <a:prstGeom prst="rect">
-            <a:avLst/>
-          </a:prstGeom>
-          <a:noFill/>
-        </p:spPr>
-        <p:txBody>
-          <a:bodyPr wrap="square">
-            <a:spAutoFit/>
-          </a:bodyPr>
-          <a:lstStyle/>
-          <a:p>
-            <a:pPr>
-              <a:defRPr sz="1600">
-                <a:solidFill>
-                  <a:srgbClr val="505050"/>
-                </a:solidFill>
-              </a:defRPr>
-            </a:pPr>
-            <a:r>
-              <a:t>2026年目標</a:t>
-            </a:r>
-          </a:p>
-          <a:p>
-            <a:pPr>
-              <a:defRPr sz="1600">
-                <a:solidFill>
-                  <a:srgbClr val="505050"/>
+            <a:pPr>
+              <a:defRPr sz="1400">
+                <a:solidFill>
+                  <a:srgbClr val="3C3C3C"/>
+                </a:solidFill>
+              </a:defRPr>
+            </a:pPr>
+            <a:r>
+              <a:t>2026 年目標</a:t>
+            </a:r>
+          </a:p>
+          <a:p>
+            <a:pPr>
+              <a:defRPr sz="1400">
+                <a:solidFill>
+                  <a:srgbClr val="3C3C3C"/>
                 </a:solidFill>
               </a:defRPr>
             </a:pPr>
@@ -4706,9 +5371,9 @@
           </a:p>
           <a:p>
             <a:pPr>
-              <a:defRPr sz="1600">
-                <a:solidFill>
-                  <a:srgbClr val="505050"/>
+              <a:defRPr sz="1400">
+                <a:solidFill>
+                  <a:srgbClr val="3C3C3C"/>
                 </a:solidFill>
               </a:defRPr>
             </a:pPr>
@@ -4718,9 +5383,9 @@
           </a:p>
           <a:p>
             <a:pPr>
-              <a:defRPr sz="1600">
-                <a:solidFill>
-                  <a:srgbClr val="505050"/>
+              <a:defRPr sz="1400">
+                <a:solidFill>
+                  <a:srgbClr val="3C3C3C"/>
                 </a:solidFill>
               </a:defRPr>
             </a:pPr>
@@ -4730,14 +5395,116 @@
           </a:p>
           <a:p>
             <a:pPr>
-              <a:defRPr sz="1600">
-                <a:solidFill>
-                  <a:srgbClr val="505050"/>
-                </a:solidFill>
-              </a:defRPr>
-            </a:pPr>
-            <a:r>
-              <a:t>🤖 AI產品搶佔市場（SaaS模式）</a:t>
+              <a:defRPr sz="1400">
+                <a:solidFill>
+                  <a:srgbClr val="3C3C3C"/>
+                </a:solidFill>
+              </a:defRPr>
+            </a:pPr>
+            <a:r>
+              <a:t>🤖 AI 產品正式搶佔市場，以 SaaS 模式</a:t>
+            </a:r>
+          </a:p>
+          <a:p>
+            <a:pPr>
+              <a:defRPr sz="1400">
+                <a:solidFill>
+                  <a:srgbClr val="3C3C3C"/>
+                </a:solidFill>
+              </a:defRPr>
+            </a:pPr>
+          </a:p>
+          <a:p>
+            <a:pPr>
+              <a:defRPr sz="1400">
+                <a:solidFill>
+                  <a:srgbClr val="3C3C3C"/>
+                </a:solidFill>
+              </a:defRPr>
+            </a:pPr>
+            <a:r>
+              <a:t>中期目標（3 年內）</a:t>
+            </a:r>
+          </a:p>
+          <a:p>
+            <a:pPr>
+              <a:defRPr sz="1400">
+                <a:solidFill>
+                  <a:srgbClr val="3C3C3C"/>
+                </a:solidFill>
+              </a:defRPr>
+            </a:pPr>
+            <a:r>
+              <a:t>🏆 成為全台最大自助娛樂品牌</a:t>
+            </a:r>
+          </a:p>
+          <a:p>
+            <a:pPr>
+              <a:defRPr sz="1400">
+                <a:solidFill>
+                  <a:srgbClr val="3C3C3C"/>
+                </a:solidFill>
+              </a:defRPr>
+            </a:pPr>
+            <a:r>
+              <a:t>🌏 進軍海外市場（香港、新加坡）</a:t>
+            </a:r>
+          </a:p>
+          <a:p>
+            <a:pPr>
+              <a:defRPr sz="1400">
+                <a:solidFill>
+                  <a:srgbClr val="3C3C3C"/>
+                </a:solidFill>
+              </a:defRPr>
+            </a:pPr>
+          </a:p>
+          <a:p>
+            <a:pPr>
+              <a:defRPr sz="1400">
+                <a:solidFill>
+                  <a:srgbClr val="3C3C3C"/>
+                </a:solidFill>
+              </a:defRPr>
+            </a:pPr>
+            <a:r>
+              <a:t>長期願景（5 年+）</a:t>
+            </a:r>
+          </a:p>
+          <a:p>
+            <a:pPr>
+              <a:defRPr sz="1400">
+                <a:solidFill>
+                  <a:srgbClr val="3C3C3C"/>
+                </a:solidFill>
+              </a:defRPr>
+            </a:pPr>
+            <a:r>
+              <a:t>✨ 重新定義休閒娛樂產業</a:t>
+            </a:r>
+          </a:p>
+          <a:p>
+            <a:pPr>
+              <a:defRPr sz="1400">
+                <a:solidFill>
+                  <a:srgbClr val="3C3C3C"/>
+                </a:solidFill>
+              </a:defRPr>
+            </a:pPr>
+            <a:r>
+              <a:t>✨ AI 驅動的無人營運標準</a:t>
+            </a:r>
+          </a:p>
+          <a:p>
+            <a:pPr>
+              <a:defRPr sz="1400">
+                <a:solidFill>
+                  <a:srgbClr val="3C3C3C"/>
+                </a:solidFill>
+              </a:defRPr>
+            </a:pPr>
+            <a:r>
+              <a:t>✨ 成為產業標竿</a:t>
             </a:r>
           </a:p>
         </p:txBody>
@@ -4785,79 +5552,205 @@
           <a:noFill/>
         </p:spPr>
         <p:txBody>
+          <a:bodyPr wrap="none">
+            <a:spAutoFit/>
+          </a:bodyPr>
+          <a:lstStyle/>
+          <a:p>
+            <a:pPr>
+              <a:defRPr sz="3200" b="1">
+                <a:solidFill>
+                  <a:srgbClr val="2C3E50"/>
+                </a:solidFill>
+              </a:defRPr>
+            </a:pPr>
+            <a:r>
+              <a:t>🔒 保密與資訊安全</a:t>
+            </a:r>
+          </a:p>
+        </p:txBody>
+      </p:sp>
+      <p:sp>
+        <p:nvSpPr>
+          <p:cNvPr id="3" name="TextBox 2"/>
+          <p:cNvSpPr txBox="1"/>
+          <p:nvPr/>
+        </p:nvSpPr>
+        <p:spPr>
+          <a:xfrm>
+            <a:off x="1371600" y="1371600"/>
+            <a:ext cx="6400800" cy="5029200"/>
+          </a:xfrm>
+          <a:prstGeom prst="rect">
+            <a:avLst/>
+          </a:prstGeom>
+          <a:noFill/>
+        </p:spPr>
+        <p:txBody>
           <a:bodyPr wrap="square">
             <a:spAutoFit/>
           </a:bodyPr>
           <a:lstStyle/>
           <a:p>
-            <a:pPr algn="l">
-              <a:defRPr sz="3200" b="1">
-                <a:solidFill>
-                  <a:srgbClr val="2C3E50"/>
-                </a:solidFill>
-              </a:defRPr>
-            </a:pPr>
-            <a:r>
-              <a:t>🔒 保密與資訊安全</a:t>
-            </a:r>
-          </a:p>
-        </p:txBody>
-      </p:sp>
-      <p:sp>
-        <p:nvSpPr>
-          <p:cNvPr id="3" name="TextBox 2"/>
-          <p:cNvSpPr txBox="1"/>
-          <p:nvPr/>
-        </p:nvSpPr>
-        <p:spPr>
-          <a:xfrm>
-            <a:off x="1371600" y="1371600"/>
-            <a:ext cx="6400800" cy="5029200"/>
-          </a:xfrm>
-          <a:prstGeom prst="rect">
-            <a:avLst/>
-          </a:prstGeom>
-          <a:noFill/>
-        </p:spPr>
-        <p:txBody>
-          <a:bodyPr wrap="square">
-            <a:spAutoFit/>
-          </a:bodyPr>
-          <a:lstStyle/>
-          <a:p>
-            <a:pPr>
-              <a:defRPr sz="1600">
-                <a:solidFill>
-                  <a:srgbClr val="505050"/>
-                </a:solidFill>
-              </a:defRPr>
-            </a:pPr>
-            <a:r>
-              <a:t>保密協議：客戶資料、營收數據、AI程式碼不外流</a:t>
-            </a:r>
-          </a:p>
-          <a:p>
-            <a:pPr>
-              <a:defRPr sz="1600">
-                <a:solidFill>
-                  <a:srgbClr val="505050"/>
-                </a:solidFill>
-              </a:defRPr>
-            </a:pPr>
-            <a:r>
-              <a:t>資安規範：密碼12字元、禁共用帳號、離職交還權限</a:t>
-            </a:r>
-          </a:p>
-          <a:p>
-            <a:pPr>
-              <a:defRPr sz="1600">
-                <a:solidFill>
-                  <a:srgbClr val="505050"/>
-                </a:solidFill>
-              </a:defRPr>
-            </a:pPr>
-            <a:r>
-              <a:t>違規後果：警告→記過→解雇+法律追訴</a:t>
+            <a:pPr>
+              <a:defRPr sz="1400">
+                <a:solidFill>
+                  <a:srgbClr val="3C3C3C"/>
+                </a:solidFill>
+              </a:defRPr>
+            </a:pPr>
+            <a:r>
+              <a:t>保密協議</a:t>
+            </a:r>
+          </a:p>
+          <a:p>
+            <a:pPr>
+              <a:defRPr sz="1400">
+                <a:solidFill>
+                  <a:srgbClr val="3C3C3C"/>
+                </a:solidFill>
+              </a:defRPr>
+            </a:pPr>
+            <a:r>
+              <a:t>🔐 客戶資料不外流</a:t>
+            </a:r>
+          </a:p>
+          <a:p>
+            <a:pPr>
+              <a:defRPr sz="1400">
+                <a:solidFill>
+                  <a:srgbClr val="3C3C3C"/>
+                </a:solidFill>
+              </a:defRPr>
+            </a:pPr>
+            <a:r>
+              <a:t>🔐 營收數據不公開</a:t>
+            </a:r>
+          </a:p>
+          <a:p>
+            <a:pPr>
+              <a:defRPr sz="1400">
+                <a:solidFill>
+                  <a:srgbClr val="3C3C3C"/>
+                </a:solidFill>
+              </a:defRPr>
+            </a:pPr>
+            <a:r>
+              <a:t>🔐 AI 系統程式碼不外傳</a:t>
+            </a:r>
+          </a:p>
+          <a:p>
+            <a:pPr>
+              <a:defRPr sz="1400">
+                <a:solidFill>
+                  <a:srgbClr val="3C3C3C"/>
+                </a:solidFill>
+              </a:defRPr>
+            </a:pPr>
+            <a:r>
+              <a:t>🔐 內部溝通記錄不截圖外傳</a:t>
+            </a:r>
+          </a:p>
+          <a:p>
+            <a:pPr>
+              <a:defRPr sz="1400">
+                <a:solidFill>
+                  <a:srgbClr val="3C3C3C"/>
+                </a:solidFill>
+              </a:defRPr>
+            </a:pPr>
+          </a:p>
+          <a:p>
+            <a:pPr>
+              <a:defRPr sz="1400">
+                <a:solidFill>
+                  <a:srgbClr val="3C3C3C"/>
+                </a:solidFill>
+              </a:defRPr>
+            </a:pPr>
+            <a:r>
+              <a:t>資訊安全規範</a:t>
+            </a:r>
+          </a:p>
+          <a:p>
+            <a:pPr>
+              <a:defRPr sz="1400">
+                <a:solidFill>
+                  <a:srgbClr val="3C3C3C"/>
+                </a:solidFill>
+              </a:defRPr>
+            </a:pPr>
+            <a:r>
+              <a:t>🔑 密碼設定：至少 12 字元，含英數符號</a:t>
+            </a:r>
+          </a:p>
+          <a:p>
+            <a:pPr>
+              <a:defRPr sz="1400">
+                <a:solidFill>
+                  <a:srgbClr val="3C3C3C"/>
+                </a:solidFill>
+              </a:defRPr>
+            </a:pPr>
+            <a:r>
+              <a:t>🔑 禁止共用帳號</a:t>
+            </a:r>
+          </a:p>
+          <a:p>
+            <a:pPr>
+              <a:defRPr sz="1400">
+                <a:solidFill>
+                  <a:srgbClr val="3C3C3C"/>
+                </a:solidFill>
+              </a:defRPr>
+            </a:pPr>
+            <a:r>
+              <a:t>🔑 離職時交還所有資料與權限</a:t>
+            </a:r>
+          </a:p>
+          <a:p>
+            <a:pPr>
+              <a:defRPr sz="1400">
+                <a:solidFill>
+                  <a:srgbClr val="3C3C3C"/>
+                </a:solidFill>
+              </a:defRPr>
+            </a:pPr>
+          </a:p>
+          <a:p>
+            <a:pPr>
+              <a:defRPr sz="1400">
+                <a:solidFill>
+                  <a:srgbClr val="3C3C3C"/>
+                </a:solidFill>
+              </a:defRPr>
+            </a:pPr>
+            <a:r>
+              <a:t>違規後果</a:t>
+            </a:r>
+          </a:p>
+          <a:p>
+            <a:pPr>
+              <a:defRPr sz="1400">
+                <a:solidFill>
+                  <a:srgbClr val="3C3C3C"/>
+                </a:solidFill>
+              </a:defRPr>
+            </a:pPr>
+            <a:r>
+              <a:t>第一次：書面警告 | 第二次：記過處分</a:t>
+            </a:r>
+          </a:p>
+          <a:p>
+            <a:pPr>
+              <a:defRPr sz="1400">
+                <a:solidFill>
+                  <a:srgbClr val="3C3C3C"/>
+                </a:solidFill>
+              </a:defRPr>
+            </a:pPr>
+            <a:r>
+              <a:t>嚴重違規：立即解雇 + 法律追訴</a:t>
             </a:r>
           </a:p>
         </p:txBody>
@@ -4905,34 +5798,112 @@
           <a:noFill/>
         </p:spPr>
         <p:txBody>
+          <a:bodyPr wrap="none">
+            <a:spAutoFit/>
+          </a:bodyPr>
+          <a:lstStyle/>
+          <a:p>
+            <a:pPr>
+              <a:defRPr sz="3200" b="1">
+                <a:solidFill>
+                  <a:srgbClr val="2C3E50"/>
+                </a:solidFill>
+              </a:defRPr>
+            </a:pPr>
+            <a:r>
+              <a:t>🏢 公司概況</a:t>
+            </a:r>
+          </a:p>
+        </p:txBody>
+      </p:sp>
+      <p:sp>
+        <p:nvSpPr>
+          <p:cNvPr id="3" name="Rectangle 2"/>
+          <p:cNvSpPr/>
+          <p:nvPr/>
+        </p:nvSpPr>
+        <p:spPr>
+          <a:xfrm>
+            <a:off x="1371600" y="1645920"/>
+            <a:ext cx="2011680" cy="1371600"/>
+          </a:xfrm>
+          <a:prstGeom prst="rect">
+            <a:avLst/>
+          </a:prstGeom>
+          <a:solidFill>
+            <a:srgbClr val="27ACB2"/>
+          </a:solidFill>
+          <a:ln>
+            <a:noFill/>
+          </a:ln>
+        </p:spPr>
+        <p:style>
+          <a:lnRef idx="1">
+            <a:schemeClr val="accent1"/>
+          </a:lnRef>
+          <a:fillRef idx="3">
+            <a:schemeClr val="accent1"/>
+          </a:fillRef>
+          <a:effectRef idx="2">
+            <a:schemeClr val="accent1"/>
+          </a:effectRef>
+          <a:fontRef idx="minor">
+            <a:schemeClr val="lt1"/>
+          </a:fontRef>
+        </p:style>
+        <p:txBody>
+          <a:bodyPr rtlCol="0" anchor="ctr"/>
+          <a:lstStyle/>
+          <a:p>
+            <a:pPr algn="ctr"/>
+          </a:p>
+        </p:txBody>
+      </p:sp>
+      <p:sp>
+        <p:nvSpPr>
+          <p:cNvPr id="4" name="TextBox 3"/>
+          <p:cNvSpPr txBox="1"/>
+          <p:nvPr/>
+        </p:nvSpPr>
+        <p:spPr>
+          <a:xfrm>
+            <a:off x="1371600" y="1920240"/>
+            <a:ext cx="2011680" cy="548640"/>
+          </a:xfrm>
+          <a:prstGeom prst="rect">
+            <a:avLst/>
+          </a:prstGeom>
+          <a:noFill/>
+        </p:spPr>
+        <p:txBody>
           <a:bodyPr wrap="square">
             <a:spAutoFit/>
           </a:bodyPr>
           <a:lstStyle/>
           <a:p>
-            <a:pPr algn="l">
-              <a:defRPr sz="3200" b="1">
-                <a:solidFill>
-                  <a:srgbClr val="2C3E50"/>
-                </a:solidFill>
-              </a:defRPr>
-            </a:pPr>
-            <a:r>
-              <a:t>🏢 公司概況</a:t>
-            </a:r>
-          </a:p>
-        </p:txBody>
-      </p:sp>
-      <p:sp>
-        <p:nvSpPr>
-          <p:cNvPr id="3" name="TextBox 2"/>
+            <a:pPr algn="ctr">
+              <a:defRPr sz="4800" b="1">
+                <a:solidFill>
+                  <a:srgbClr val="FFFFFF"/>
+                </a:solidFill>
+              </a:defRPr>
+            </a:pPr>
+            <a:r>
+              <a:t>105</a:t>
+            </a:r>
+          </a:p>
+        </p:txBody>
+      </p:sp>
+      <p:sp>
+        <p:nvSpPr>
+          <p:cNvPr id="5" name="TextBox 4"/>
           <p:cNvSpPr txBox="1"/>
           <p:nvPr/>
         </p:nvSpPr>
         <p:spPr>
           <a:xfrm>
-            <a:off x="1371600" y="1371600"/>
-            <a:ext cx="6400800" cy="5029200"/>
+            <a:off x="1371600" y="2514600"/>
+            <a:ext cx="2011680" cy="365760"/>
           </a:xfrm>
           <a:prstGeom prst="rect">
             <a:avLst/>
@@ -4945,51 +5916,324 @@
           </a:bodyPr>
           <a:lstStyle/>
           <a:p>
+            <a:pPr algn="ctr">
+              <a:defRPr sz="2000" b="0">
+                <a:solidFill>
+                  <a:srgbClr val="FFFFFF"/>
+                </a:solidFill>
+              </a:defRPr>
+            </a:pPr>
+            <a:r>
+              <a:t>營運店家</a:t>
+            </a:r>
+          </a:p>
+        </p:txBody>
+      </p:sp>
+      <p:sp>
+        <p:nvSpPr>
+          <p:cNvPr id="6" name="Rectangle 5"/>
+          <p:cNvSpPr/>
+          <p:nvPr/>
+        </p:nvSpPr>
+        <p:spPr>
+          <a:xfrm>
+            <a:off x="3657600" y="1645920"/>
+            <a:ext cx="2011680" cy="1371600"/>
+          </a:xfrm>
+          <a:prstGeom prst="rect">
+            <a:avLst/>
+          </a:prstGeom>
+          <a:solidFill>
+            <a:srgbClr val="27ACB2"/>
+          </a:solidFill>
+          <a:ln>
+            <a:noFill/>
+          </a:ln>
+        </p:spPr>
+        <p:style>
+          <a:lnRef idx="1">
+            <a:schemeClr val="accent1"/>
+          </a:lnRef>
+          <a:fillRef idx="3">
+            <a:schemeClr val="accent1"/>
+          </a:fillRef>
+          <a:effectRef idx="2">
+            <a:schemeClr val="accent1"/>
+          </a:effectRef>
+          <a:fontRef idx="minor">
+            <a:schemeClr val="lt1"/>
+          </a:fontRef>
+        </p:style>
+        <p:txBody>
+          <a:bodyPr rtlCol="0" anchor="ctr"/>
+          <a:lstStyle/>
+          <a:p>
+            <a:pPr algn="ctr"/>
+          </a:p>
+        </p:txBody>
+      </p:sp>
+      <p:sp>
+        <p:nvSpPr>
+          <p:cNvPr id="7" name="TextBox 6"/>
+          <p:cNvSpPr txBox="1"/>
+          <p:nvPr/>
+        </p:nvSpPr>
+        <p:spPr>
+          <a:xfrm>
+            <a:off x="3657600" y="1920240"/>
+            <a:ext cx="2011680" cy="548640"/>
+          </a:xfrm>
+          <a:prstGeom prst="rect">
+            <a:avLst/>
+          </a:prstGeom>
+          <a:noFill/>
+        </p:spPr>
+        <p:txBody>
+          <a:bodyPr wrap="square">
+            <a:spAutoFit/>
+          </a:bodyPr>
+          <a:lstStyle/>
+          <a:p>
+            <a:pPr algn="ctr">
+              <a:defRPr sz="4800" b="1">
+                <a:solidFill>
+                  <a:srgbClr val="FFFFFF"/>
+                </a:solidFill>
+              </a:defRPr>
+            </a:pPr>
+            <a:r>
+              <a:t>10萬</a:t>
+            </a:r>
+          </a:p>
+        </p:txBody>
+      </p:sp>
+      <p:sp>
+        <p:nvSpPr>
+          <p:cNvPr id="8" name="TextBox 7"/>
+          <p:cNvSpPr txBox="1"/>
+          <p:nvPr/>
+        </p:nvSpPr>
+        <p:spPr>
+          <a:xfrm>
+            <a:off x="3657600" y="2514600"/>
+            <a:ext cx="2011680" cy="365760"/>
+          </a:xfrm>
+          <a:prstGeom prst="rect">
+            <a:avLst/>
+          </a:prstGeom>
+          <a:noFill/>
+        </p:spPr>
+        <p:txBody>
+          <a:bodyPr wrap="square">
+            <a:spAutoFit/>
+          </a:bodyPr>
+          <a:lstStyle/>
+          <a:p>
+            <a:pPr algn="ctr">
+              <a:defRPr sz="2000" b="0">
+                <a:solidFill>
+                  <a:srgbClr val="FFFFFF"/>
+                </a:solidFill>
+              </a:defRPr>
+            </a:pPr>
+            <a:r>
+              <a:t>會員數</a:t>
+            </a:r>
+          </a:p>
+        </p:txBody>
+      </p:sp>
+      <p:sp>
+        <p:nvSpPr>
+          <p:cNvPr id="9" name="Rectangle 8"/>
+          <p:cNvSpPr/>
+          <p:nvPr/>
+        </p:nvSpPr>
+        <p:spPr>
+          <a:xfrm>
+            <a:off x="5943600" y="1645920"/>
+            <a:ext cx="2011680" cy="1371600"/>
+          </a:xfrm>
+          <a:prstGeom prst="rect">
+            <a:avLst/>
+          </a:prstGeom>
+          <a:solidFill>
+            <a:srgbClr val="27ACB2"/>
+          </a:solidFill>
+          <a:ln>
+            <a:noFill/>
+          </a:ln>
+        </p:spPr>
+        <p:style>
+          <a:lnRef idx="1">
+            <a:schemeClr val="accent1"/>
+          </a:lnRef>
+          <a:fillRef idx="3">
+            <a:schemeClr val="accent1"/>
+          </a:fillRef>
+          <a:effectRef idx="2">
+            <a:schemeClr val="accent1"/>
+          </a:effectRef>
+          <a:fontRef idx="minor">
+            <a:schemeClr val="lt1"/>
+          </a:fontRef>
+        </p:style>
+        <p:txBody>
+          <a:bodyPr rtlCol="0" anchor="ctr"/>
+          <a:lstStyle/>
+          <a:p>
+            <a:pPr algn="ctr"/>
+          </a:p>
+        </p:txBody>
+      </p:sp>
+      <p:sp>
+        <p:nvSpPr>
+          <p:cNvPr id="10" name="TextBox 9"/>
+          <p:cNvSpPr txBox="1"/>
+          <p:nvPr/>
+        </p:nvSpPr>
+        <p:spPr>
+          <a:xfrm>
+            <a:off x="5943600" y="1920240"/>
+            <a:ext cx="2011680" cy="548640"/>
+          </a:xfrm>
+          <a:prstGeom prst="rect">
+            <a:avLst/>
+          </a:prstGeom>
+          <a:noFill/>
+        </p:spPr>
+        <p:txBody>
+          <a:bodyPr wrap="square">
+            <a:spAutoFit/>
+          </a:bodyPr>
+          <a:lstStyle/>
+          <a:p>
+            <a:pPr algn="ctr">
+              <a:defRPr sz="4800" b="1">
+                <a:solidFill>
+                  <a:srgbClr val="FFFFFF"/>
+                </a:solidFill>
+              </a:defRPr>
+            </a:pPr>
+            <a:r>
+              <a:t>24/7</a:t>
+            </a:r>
+          </a:p>
+        </p:txBody>
+      </p:sp>
+      <p:sp>
+        <p:nvSpPr>
+          <p:cNvPr id="11" name="TextBox 10"/>
+          <p:cNvSpPr txBox="1"/>
+          <p:nvPr/>
+        </p:nvSpPr>
+        <p:spPr>
+          <a:xfrm>
+            <a:off x="5943600" y="2514600"/>
+            <a:ext cx="2011680" cy="365760"/>
+          </a:xfrm>
+          <a:prstGeom prst="rect">
+            <a:avLst/>
+          </a:prstGeom>
+          <a:noFill/>
+        </p:spPr>
+        <p:txBody>
+          <a:bodyPr wrap="square">
+            <a:spAutoFit/>
+          </a:bodyPr>
+          <a:lstStyle/>
+          <a:p>
+            <a:pPr algn="ctr">
+              <a:defRPr sz="2000" b="0">
+                <a:solidFill>
+                  <a:srgbClr val="FFFFFF"/>
+                </a:solidFill>
+              </a:defRPr>
+            </a:pPr>
+            <a:r>
+              <a:t>無人營運</a:t>
+            </a:r>
+          </a:p>
+        </p:txBody>
+      </p:sp>
+      <p:sp>
+        <p:nvSpPr>
+          <p:cNvPr id="12" name="TextBox 11"/>
+          <p:cNvSpPr txBox="1"/>
+          <p:nvPr/>
+        </p:nvSpPr>
+        <p:spPr>
+          <a:xfrm>
+            <a:off x="1371600" y="3474720"/>
+            <a:ext cx="6400800" cy="5029200"/>
+          </a:xfrm>
+          <a:prstGeom prst="rect">
+            <a:avLst/>
+          </a:prstGeom>
+          <a:noFill/>
+        </p:spPr>
+        <p:txBody>
+          <a:bodyPr wrap="square">
+            <a:spAutoFit/>
+          </a:bodyPr>
+          <a:lstStyle/>
+          <a:p>
             <a:pPr>
               <a:defRPr sz="1800">
                 <a:solidFill>
-                  <a:srgbClr val="505050"/>
-                </a:solidFill>
-              </a:defRPr>
-            </a:pPr>
-            <a:r>
-              <a:t>105 營運店家、10萬 會員、24/7 無人營運</a:t>
+                  <a:srgbClr val="3C3C3C"/>
+                </a:solidFill>
+              </a:defRPr>
+            </a:pPr>
+            <a:r>
+              <a:t>ONE桌遊 - 自助桌遊館品牌</a:t>
             </a:r>
           </a:p>
           <a:p>
             <a:pPr>
               <a:defRPr sz="1800">
                 <a:solidFill>
-                  <a:srgbClr val="505050"/>
-                </a:solidFill>
-              </a:defRPr>
-            </a:pPr>
-            <a:r>
-              <a:t>ONE桌遊 - 全台最大自助麻將桌遊連鎖品牌</a:t>
+                  <a:srgbClr val="3C3C3C"/>
+                </a:solidFill>
+              </a:defRPr>
+            </a:pPr>
+            <a:r>
+              <a:t>✅ 全台最大自助麻將桌遊連鎖品牌</a:t>
             </a:r>
           </a:p>
           <a:p>
             <a:pPr>
               <a:defRPr sz="1800">
                 <a:solidFill>
-                  <a:srgbClr val="505050"/>
-                </a:solidFill>
-              </a:defRPr>
-            </a:pPr>
-            <a:r>
-              <a:t>AI 智能管理系統</a:t>
+                  <a:srgbClr val="3C3C3C"/>
+                </a:solidFill>
+              </a:defRPr>
+            </a:pPr>
+            <a:r>
+              <a:t>✅ AI 智能管理系統（門鎖、監控、繳費）</a:t>
             </a:r>
           </a:p>
           <a:p>
             <a:pPr>
               <a:defRPr sz="1800">
                 <a:solidFill>
-                  <a:srgbClr val="505050"/>
-                </a:solidFill>
-              </a:defRPr>
-            </a:pPr>
-            <a:r>
-              <a:t>子品牌「智摸科技」</a:t>
+                  <a:srgbClr val="3C3C3C"/>
+                </a:solidFill>
+              </a:defRPr>
+            </a:pPr>
+            <a:r>
+              <a:t>✅ 24小時無人營運模式</a:t>
+            </a:r>
+          </a:p>
+          <a:p>
+            <a:pPr>
+              <a:defRPr sz="1800">
+                <a:solidFill>
+                  <a:srgbClr val="3C3C3C"/>
+                </a:solidFill>
+              </a:defRPr>
+            </a:pPr>
+            <a:r>
+              <a:t>✅ 子品牌「智摸科技」- 麻將自助系統</a:t>
             </a:r>
           </a:p>
         </p:txBody>
@@ -5037,91 +6281,181 @@
           <a:noFill/>
         </p:spPr>
         <p:txBody>
+          <a:bodyPr wrap="none">
+            <a:spAutoFit/>
+          </a:bodyPr>
+          <a:lstStyle/>
+          <a:p>
+            <a:pPr>
+              <a:defRPr sz="3200" b="1">
+                <a:solidFill>
+                  <a:srgbClr val="2C3E50"/>
+                </a:solidFill>
+              </a:defRPr>
+            </a:pPr>
+            <a:r>
+              <a:t>🏢 辦公室實務資訊</a:t>
+            </a:r>
+          </a:p>
+        </p:txBody>
+      </p:sp>
+      <p:sp>
+        <p:nvSpPr>
+          <p:cNvPr id="3" name="TextBox 2"/>
+          <p:cNvSpPr txBox="1"/>
+          <p:nvPr/>
+        </p:nvSpPr>
+        <p:spPr>
+          <a:xfrm>
+            <a:off x="1371600" y="1371600"/>
+            <a:ext cx="6400800" cy="5029200"/>
+          </a:xfrm>
+          <a:prstGeom prst="rect">
+            <a:avLst/>
+          </a:prstGeom>
+          <a:noFill/>
+        </p:spPr>
+        <p:txBody>
           <a:bodyPr wrap="square">
             <a:spAutoFit/>
           </a:bodyPr>
           <a:lstStyle/>
           <a:p>
-            <a:pPr algn="l">
-              <a:defRPr sz="3200" b="1">
-                <a:solidFill>
-                  <a:srgbClr val="2C3E50"/>
-                </a:solidFill>
-              </a:defRPr>
-            </a:pPr>
-            <a:r>
-              <a:t>🏢 辦公室實務資訊</a:t>
-            </a:r>
-          </a:p>
-        </p:txBody>
-      </p:sp>
-      <p:sp>
-        <p:nvSpPr>
-          <p:cNvPr id="3" name="TextBox 2"/>
-          <p:cNvSpPr txBox="1"/>
-          <p:nvPr/>
-        </p:nvSpPr>
-        <p:spPr>
-          <a:xfrm>
-            <a:off x="1371600" y="1371600"/>
-            <a:ext cx="6400800" cy="5029200"/>
-          </a:xfrm>
-          <a:prstGeom prst="rect">
-            <a:avLst/>
-          </a:prstGeom>
-          <a:noFill/>
-        </p:spPr>
-        <p:txBody>
-          <a:bodyPr wrap="square">
-            <a:spAutoFit/>
-          </a:bodyPr>
-          <a:lstStyle/>
-          <a:p>
-            <a:pPr>
-              <a:defRPr sz="1600">
-                <a:solidFill>
-                  <a:srgbClr val="505050"/>
-                </a:solidFill>
-              </a:defRPr>
-            </a:pPr>
-            <a:r>
-              <a:t>上班時間：13:00-21:00（下午1點到晚上9點）</a:t>
-            </a:r>
-          </a:p>
-          <a:p>
-            <a:pPr>
-              <a:defRPr sz="1600">
-                <a:solidFill>
-                  <a:srgbClr val="505050"/>
-                </a:solidFill>
-              </a:defRPr>
-            </a:pPr>
-            <a:r>
-              <a:t>打卡：臉部辨識，二樓辦公室入口處</a:t>
-            </a:r>
-          </a:p>
-          <a:p>
-            <a:pPr>
-              <a:defRPr sz="1600">
-                <a:solidFill>
-                  <a:srgbClr val="505050"/>
-                </a:solidFill>
-              </a:defRPr>
-            </a:pPr>
-            <a:r>
-              <a:t>垃圾：不用分類，放門口右邊緊急配電處</a:t>
-            </a:r>
-          </a:p>
-          <a:p>
-            <a:pPr>
-              <a:defRPr sz="1600">
-                <a:solidFill>
-                  <a:srgbClr val="505050"/>
-                </a:solidFill>
-              </a:defRPr>
-            </a:pPr>
-            <a:r>
-              <a:t>環境：每週一次專人打掃大環境及廁所</a:t>
+            <a:pPr>
+              <a:defRPr sz="1400">
+                <a:solidFill>
+                  <a:srgbClr val="3C3C3C"/>
+                </a:solidFill>
+              </a:defRPr>
+            </a:pPr>
+            <a:r>
+              <a:t>上下班時間</a:t>
+            </a:r>
+          </a:p>
+          <a:p>
+            <a:pPr>
+              <a:defRPr sz="1400">
+                <a:solidFill>
+                  <a:srgbClr val="3C3C3C"/>
+                </a:solidFill>
+              </a:defRPr>
+            </a:pPr>
+            <a:r>
+              <a:t>⏰ 正常工時：13:00-21:00（下午1點到晚上9點）</a:t>
+            </a:r>
+          </a:p>
+          <a:p>
+            <a:pPr>
+              <a:defRPr sz="1400">
+                <a:solidFill>
+                  <a:srgbClr val="3C3C3C"/>
+                </a:solidFill>
+              </a:defRPr>
+            </a:pPr>
+            <a:r>
+              <a:t>⏰ 彈性工時：無，固定時段</a:t>
+            </a:r>
+          </a:p>
+          <a:p>
+            <a:pPr>
+              <a:defRPr sz="1400">
+                <a:solidFill>
+                  <a:srgbClr val="3C3C3C"/>
+                </a:solidFill>
+              </a:defRPr>
+            </a:pPr>
+            <a:r>
+              <a:t>🍱 午餐時間：可自行安排</a:t>
+            </a:r>
+          </a:p>
+          <a:p>
+            <a:pPr>
+              <a:defRPr sz="1400">
+                <a:solidFill>
+                  <a:srgbClr val="3C3C3C"/>
+                </a:solidFill>
+              </a:defRPr>
+            </a:pPr>
+          </a:p>
+          <a:p>
+            <a:pPr>
+              <a:defRPr sz="1400">
+                <a:solidFill>
+                  <a:srgbClr val="3C3C3C"/>
+                </a:solidFill>
+              </a:defRPr>
+            </a:pPr>
+            <a:r>
+              <a:t>辦公地點</a:t>
+            </a:r>
+          </a:p>
+          <a:p>
+            <a:pPr>
+              <a:defRPr sz="1400">
+                <a:solidFill>
+                  <a:srgbClr val="3C3C3C"/>
+                </a:solidFill>
+              </a:defRPr>
+            </a:pPr>
+            <a:r>
+              <a:t>🔑 打卡方式：臉部辨識打卡，二樓辦公室入口處</a:t>
+            </a:r>
+          </a:p>
+          <a:p>
+            <a:pPr>
+              <a:defRPr sz="1400">
+                <a:solidFill>
+                  <a:srgbClr val="3C3C3C"/>
+                </a:solidFill>
+              </a:defRPr>
+            </a:pPr>
+          </a:p>
+          <a:p>
+            <a:pPr>
+              <a:defRPr sz="1400">
+                <a:solidFill>
+                  <a:srgbClr val="3C3C3C"/>
+                </a:solidFill>
+              </a:defRPr>
+            </a:pPr>
+            <a:r>
+              <a:t>辦公環境</a:t>
+            </a:r>
+          </a:p>
+          <a:p>
+            <a:pPr>
+              <a:defRPr sz="1400">
+                <a:solidFill>
+                  <a:srgbClr val="3C3C3C"/>
+                </a:solidFill>
+              </a:defRPr>
+            </a:pPr>
+            <a:r>
+              <a:t>♻️ 垃圾處理：不用分類，打包後放門口右邊緊急配電處，</a:t>
+            </a:r>
+          </a:p>
+          <a:p>
+            <a:pPr lvl="1">
+              <a:defRPr sz="1400">
+                <a:solidFill>
+                  <a:srgbClr val="3C3C3C"/>
+                </a:solidFill>
+              </a:defRPr>
+            </a:pPr>
+            <a:r>
+              <a:t>            每天有人來收</a:t>
+            </a:r>
+          </a:p>
+          <a:p>
+            <a:pPr>
+              <a:defRPr sz="1400">
+                <a:solidFill>
+                  <a:srgbClr val="3C3C3C"/>
+                </a:solidFill>
+              </a:defRPr>
+            </a:pPr>
+            <a:r>
+              <a:t>🧹 環境打掃：每週一次專人打掃大環境及廁所</a:t>
             </a:r>
           </a:p>
         </p:txBody>
@@ -5169,103 +6503,172 @@
           <a:noFill/>
         </p:spPr>
         <p:txBody>
+          <a:bodyPr wrap="none">
+            <a:spAutoFit/>
+          </a:bodyPr>
+          <a:lstStyle/>
+          <a:p>
+            <a:pPr>
+              <a:defRPr sz="3200" b="1">
+                <a:solidFill>
+                  <a:srgbClr val="2C3E50"/>
+                </a:solidFill>
+              </a:defRPr>
+            </a:pPr>
+            <a:r>
+              <a:t>📈 職涯發展與成長機會</a:t>
+            </a:r>
+          </a:p>
+        </p:txBody>
+      </p:sp>
+      <p:sp>
+        <p:nvSpPr>
+          <p:cNvPr id="3" name="TextBox 2"/>
+          <p:cNvSpPr txBox="1"/>
+          <p:nvPr/>
+        </p:nvSpPr>
+        <p:spPr>
+          <a:xfrm>
+            <a:off x="1371600" y="1371600"/>
+            <a:ext cx="6400800" cy="5029200"/>
+          </a:xfrm>
+          <a:prstGeom prst="rect">
+            <a:avLst/>
+          </a:prstGeom>
+          <a:noFill/>
+        </p:spPr>
+        <p:txBody>
           <a:bodyPr wrap="square">
             <a:spAutoFit/>
           </a:bodyPr>
           <a:lstStyle/>
           <a:p>
-            <a:pPr algn="l">
-              <a:defRPr sz="3200" b="1">
-                <a:solidFill>
-                  <a:srgbClr val="2C3E50"/>
-                </a:solidFill>
-              </a:defRPr>
-            </a:pPr>
-            <a:r>
-              <a:t>📈 職涯發展</a:t>
-            </a:r>
-          </a:p>
-        </p:txBody>
-      </p:sp>
-      <p:sp>
-        <p:nvSpPr>
-          <p:cNvPr id="3" name="TextBox 2"/>
-          <p:cNvSpPr txBox="1"/>
-          <p:nvPr/>
-        </p:nvSpPr>
-        <p:spPr>
-          <a:xfrm>
-            <a:off x="1371600" y="1371600"/>
-            <a:ext cx="6400800" cy="5029200"/>
-          </a:xfrm>
-          <a:prstGeom prst="rect">
-            <a:avLst/>
-          </a:prstGeom>
-          <a:noFill/>
-        </p:spPr>
-        <p:txBody>
-          <a:bodyPr wrap="square">
-            <a:spAutoFit/>
-          </a:bodyPr>
-          <a:lstStyle/>
-          <a:p>
-            <a:pPr>
-              <a:defRPr sz="1600">
-                <a:solidFill>
-                  <a:srgbClr val="505050"/>
-                </a:solidFill>
-              </a:defRPr>
-            </a:pPr>
-            <a:r>
-              <a:t>從執行→管理</a:t>
-            </a:r>
-          </a:p>
-          <a:p>
-            <a:pPr>
-              <a:defRPr sz="1600">
-                <a:solidFill>
-                  <a:srgbClr val="505050"/>
-                </a:solidFill>
-              </a:defRPr>
-            </a:pPr>
-            <a:r>
-              <a:t>從單一職能→跨領域</a:t>
-            </a:r>
-          </a:p>
-          <a:p>
-            <a:pPr>
-              <a:defRPr sz="1600">
-                <a:solidFill>
-                  <a:srgbClr val="505050"/>
-                </a:solidFill>
-              </a:defRPr>
-            </a:pPr>
-            <a:r>
-              <a:t>從傳統→AI協作</a:t>
-            </a:r>
-          </a:p>
-          <a:p>
-            <a:pPr>
-              <a:defRPr sz="1600">
-                <a:solidFill>
-                  <a:srgbClr val="505050"/>
-                </a:solidFill>
-              </a:defRPr>
-            </a:pPr>
-            <a:r>
-              <a:t>從員工→核心夥伴</a:t>
-            </a:r>
-          </a:p>
-          <a:p>
-            <a:pPr>
-              <a:defRPr sz="1600">
-                <a:solidFill>
-                  <a:srgbClr val="505050"/>
-                </a:solidFill>
-              </a:defRPr>
-            </a:pPr>
-            <a:r>
-              <a:t>你將學到：AI工作方法、快速成長企業營運</a:t>
+            <a:pPr>
+              <a:defRPr sz="1400">
+                <a:solidFill>
+                  <a:srgbClr val="3C3C3C"/>
+                </a:solidFill>
+              </a:defRPr>
+            </a:pPr>
+            <a:r>
+              <a:t>公司處於快速發展期，機會很多</a:t>
+            </a:r>
+          </a:p>
+          <a:p>
+            <a:pPr>
+              <a:defRPr sz="1400">
+                <a:solidFill>
+                  <a:srgbClr val="3C3C3C"/>
+                </a:solidFill>
+              </a:defRPr>
+            </a:pPr>
+            <a:r>
+              <a:t>📊 從執行 → 管理</a:t>
+            </a:r>
+          </a:p>
+          <a:p>
+            <a:pPr>
+              <a:defRPr sz="1400">
+                <a:solidFill>
+                  <a:srgbClr val="3C3C3C"/>
+                </a:solidFill>
+              </a:defRPr>
+            </a:pPr>
+            <a:r>
+              <a:t>📊 從單一職能 → 跨領域</a:t>
+            </a:r>
+          </a:p>
+          <a:p>
+            <a:pPr>
+              <a:defRPr sz="1400">
+                <a:solidFill>
+                  <a:srgbClr val="3C3C3C"/>
+                </a:solidFill>
+              </a:defRPr>
+            </a:pPr>
+            <a:r>
+              <a:t>📊 從傳統工作 → AI 協作</a:t>
+            </a:r>
+          </a:p>
+          <a:p>
+            <a:pPr>
+              <a:defRPr sz="1400">
+                <a:solidFill>
+                  <a:srgbClr val="3C3C3C"/>
+                </a:solidFill>
+              </a:defRPr>
+            </a:pPr>
+            <a:r>
+              <a:t>📊 從員工 → 核心夥伴</a:t>
+            </a:r>
+          </a:p>
+          <a:p>
+            <a:pPr>
+              <a:defRPr sz="1400">
+                <a:solidFill>
+                  <a:srgbClr val="3C3C3C"/>
+                </a:solidFill>
+              </a:defRPr>
+            </a:pPr>
+          </a:p>
+          <a:p>
+            <a:pPr>
+              <a:defRPr sz="1400">
+                <a:solidFill>
+                  <a:srgbClr val="3C3C3C"/>
+                </a:solidFill>
+              </a:defRPr>
+            </a:pPr>
+            <a:r>
+              <a:t>你將學到</a:t>
+            </a:r>
+          </a:p>
+          <a:p>
+            <a:pPr>
+              <a:defRPr sz="1400">
+                <a:solidFill>
+                  <a:srgbClr val="3C3C3C"/>
+                </a:solidFill>
+              </a:defRPr>
+            </a:pPr>
+            <a:r>
+              <a:t>🎯 AI 時代的工作方法</a:t>
+            </a:r>
+          </a:p>
+          <a:p>
+            <a:pPr>
+              <a:defRPr sz="1400">
+                <a:solidFill>
+                  <a:srgbClr val="3C3C3C"/>
+                </a:solidFill>
+              </a:defRPr>
+            </a:pPr>
+            <a:r>
+              <a:t>🎯 快速成長企業的營運模式</a:t>
+            </a:r>
+          </a:p>
+          <a:p>
+            <a:pPr>
+              <a:defRPr sz="1400">
+                <a:solidFill>
+                  <a:srgbClr val="3C3C3C"/>
+                </a:solidFill>
+              </a:defRPr>
+            </a:pPr>
+            <a:r>
+              <a:t>🎯 多系統整合的實戰經驗</a:t>
+            </a:r>
+          </a:p>
+          <a:p>
+            <a:pPr>
+              <a:defRPr sz="1400">
+                <a:solidFill>
+                  <a:srgbClr val="3C3C3C"/>
+                </a:solidFill>
+              </a:defRPr>
+            </a:pPr>
+            <a:r>
+              <a:t>🎯 從 0 到 1 建立新事業的能力</a:t>
             </a:r>
           </a:p>
         </p:txBody>
@@ -5313,91 +6716,160 @@
           <a:noFill/>
         </p:spPr>
         <p:txBody>
+          <a:bodyPr wrap="none">
+            <a:spAutoFit/>
+          </a:bodyPr>
+          <a:lstStyle/>
+          <a:p>
+            <a:pPr>
+              <a:defRPr sz="3200" b="1">
+                <a:solidFill>
+                  <a:srgbClr val="2C3E50"/>
+                </a:solidFill>
+              </a:defRPr>
+            </a:pPr>
+            <a:r>
+              <a:t>🌟 公司文化與價值觀</a:t>
+            </a:r>
+          </a:p>
+        </p:txBody>
+      </p:sp>
+      <p:sp>
+        <p:nvSpPr>
+          <p:cNvPr id="3" name="TextBox 2"/>
+          <p:cNvSpPr txBox="1"/>
+          <p:nvPr/>
+        </p:nvSpPr>
+        <p:spPr>
+          <a:xfrm>
+            <a:off x="1371600" y="1371600"/>
+            <a:ext cx="6400800" cy="5029200"/>
+          </a:xfrm>
+          <a:prstGeom prst="rect">
+            <a:avLst/>
+          </a:prstGeom>
+          <a:noFill/>
+        </p:spPr>
+        <p:txBody>
           <a:bodyPr wrap="square">
             <a:spAutoFit/>
           </a:bodyPr>
           <a:lstStyle/>
           <a:p>
-            <a:pPr algn="l">
-              <a:defRPr sz="3200" b="1">
-                <a:solidFill>
-                  <a:srgbClr val="2C3E50"/>
-                </a:solidFill>
-              </a:defRPr>
-            </a:pPr>
-            <a:r>
-              <a:t>🌟 公司文化</a:t>
-            </a:r>
-          </a:p>
-        </p:txBody>
-      </p:sp>
-      <p:sp>
-        <p:nvSpPr>
-          <p:cNvPr id="3" name="TextBox 2"/>
-          <p:cNvSpPr txBox="1"/>
-          <p:nvPr/>
-        </p:nvSpPr>
-        <p:spPr>
-          <a:xfrm>
-            <a:off x="1371600" y="1371600"/>
-            <a:ext cx="6400800" cy="5029200"/>
-          </a:xfrm>
-          <a:prstGeom prst="rect">
-            <a:avLst/>
-          </a:prstGeom>
-          <a:noFill/>
-        </p:spPr>
-        <p:txBody>
-          <a:bodyPr wrap="square">
-            <a:spAutoFit/>
-          </a:bodyPr>
-          <a:lstStyle/>
-          <a:p>
-            <a:pPr>
-              <a:defRPr sz="1600">
-                <a:solidFill>
-                  <a:srgbClr val="505050"/>
-                </a:solidFill>
-              </a:defRPr>
-            </a:pPr>
-            <a:r>
-              <a:t>🚀 快速行動</a:t>
-            </a:r>
-          </a:p>
-          <a:p>
-            <a:pPr>
-              <a:defRPr sz="1600">
-                <a:solidFill>
-                  <a:srgbClr val="505050"/>
-                </a:solidFill>
-              </a:defRPr>
-            </a:pPr>
-            <a:r>
-              <a:t>🤝 團隊協作</a:t>
-            </a:r>
-          </a:p>
-          <a:p>
-            <a:pPr>
-              <a:defRPr sz="1600">
-                <a:solidFill>
-                  <a:srgbClr val="505050"/>
-                </a:solidFill>
-              </a:defRPr>
-            </a:pPr>
-            <a:r>
-              <a:t>💡 擁抱創新</a:t>
-            </a:r>
-          </a:p>
-          <a:p>
-            <a:pPr>
-              <a:defRPr sz="1600">
-                <a:solidFill>
-                  <a:srgbClr val="505050"/>
-                </a:solidFill>
-              </a:defRPr>
-            </a:pPr>
-            <a:r>
-              <a:t>工具&gt;經驗、思考&gt;執行、速度&gt;完美</a:t>
+            <a:pPr>
+              <a:defRPr sz="1400">
+                <a:solidFill>
+                  <a:srgbClr val="3C3C3C"/>
+                </a:solidFill>
+              </a:defRPr>
+            </a:pPr>
+            <a:r>
+              <a:t>核心價值觀</a:t>
+            </a:r>
+          </a:p>
+          <a:p>
+            <a:pPr>
+              <a:defRPr sz="1400">
+                <a:solidFill>
+                  <a:srgbClr val="3C3C3C"/>
+                </a:solidFill>
+              </a:defRPr>
+            </a:pPr>
+            <a:r>
+              <a:t>🚀 快速行動 - 想到就做，邊做邊調整</a:t>
+            </a:r>
+          </a:p>
+          <a:p>
+            <a:pPr>
+              <a:defRPr sz="1400">
+                <a:solidFill>
+                  <a:srgbClr val="3C3C3C"/>
+                </a:solidFill>
+              </a:defRPr>
+            </a:pPr>
+            <a:r>
+              <a:t>🤝 團隊協作 - 一起衝刺，共享成果</a:t>
+            </a:r>
+          </a:p>
+          <a:p>
+            <a:pPr>
+              <a:defRPr sz="1400">
+                <a:solidFill>
+                  <a:srgbClr val="3C3C3C"/>
+                </a:solidFill>
+              </a:defRPr>
+            </a:pPr>
+            <a:r>
+              <a:t>💡 擁抱創新 - 用 AI，用新工具，用新方法</a:t>
+            </a:r>
+          </a:p>
+          <a:p>
+            <a:pPr>
+              <a:defRPr sz="1400">
+                <a:solidFill>
+                  <a:srgbClr val="3C3C3C"/>
+                </a:solidFill>
+              </a:defRPr>
+            </a:pPr>
+          </a:p>
+          <a:p>
+            <a:pPr>
+              <a:defRPr sz="1400">
+                <a:solidFill>
+                  <a:srgbClr val="3C3C3C"/>
+                </a:solidFill>
+              </a:defRPr>
+            </a:pPr>
+            <a:r>
+              <a:t>我們相信</a:t>
+            </a:r>
+          </a:p>
+          <a:p>
+            <a:pPr>
+              <a:defRPr sz="1400">
+                <a:solidFill>
+                  <a:srgbClr val="3C3C3C"/>
+                </a:solidFill>
+              </a:defRPr>
+            </a:pPr>
+            <a:r>
+              <a:t>⭐ 工具比經驗重要（AI 時代）</a:t>
+            </a:r>
+          </a:p>
+          <a:p>
+            <a:pPr>
+              <a:defRPr sz="1400">
+                <a:solidFill>
+                  <a:srgbClr val="3C3C3C"/>
+                </a:solidFill>
+              </a:defRPr>
+            </a:pPr>
+            <a:r>
+              <a:t>⭐ 思考比執行重要（會思考才能駕馭工具）</a:t>
+            </a:r>
+          </a:p>
+          <a:p>
+            <a:pPr>
+              <a:defRPr sz="1400">
+                <a:solidFill>
+                  <a:srgbClr val="3C3C3C"/>
+                </a:solidFill>
+              </a:defRPr>
+            </a:pPr>
+            <a:r>
+              <a:t>⭐ 速度比完美重要（快速迭代）</a:t>
+            </a:r>
+          </a:p>
+          <a:p>
+            <a:pPr>
+              <a:defRPr sz="1400">
+                <a:solidFill>
+                  <a:srgbClr val="3C3C3C"/>
+                </a:solidFill>
+              </a:defRPr>
+            </a:pPr>
+            <a:r>
+              <a:t>⭐ 成長比穩定重要（發展期的選擇）</a:t>
             </a:r>
           </a:p>
         </p:txBody>
@@ -5465,13 +6937,157 @@
       </p:sp>
       <p:sp>
         <p:nvSpPr>
-          <p:cNvPr id="3" name="TextBox 2"/>
+          <p:cNvPr id="3" name="Rectangle 2"/>
+          <p:cNvSpPr/>
+          <p:nvPr/>
+        </p:nvSpPr>
+        <p:spPr>
+          <a:xfrm>
+            <a:off x="1371600" y="3200400"/>
+            <a:ext cx="6400800" cy="1828800"/>
+          </a:xfrm>
+          <a:prstGeom prst="rect">
+            <a:avLst/>
+          </a:prstGeom>
+          <a:solidFill>
+            <a:srgbClr val="27ACB2"/>
+          </a:solidFill>
+          <a:ln>
+            <a:noFill/>
+          </a:ln>
+        </p:spPr>
+        <p:style>
+          <a:lnRef idx="1">
+            <a:schemeClr val="accent1"/>
+          </a:lnRef>
+          <a:fillRef idx="3">
+            <a:schemeClr val="accent1"/>
+          </a:fillRef>
+          <a:effectRef idx="2">
+            <a:schemeClr val="accent1"/>
+          </a:effectRef>
+          <a:fontRef idx="minor">
+            <a:schemeClr val="lt1"/>
+          </a:fontRef>
+        </p:style>
+        <p:txBody>
+          <a:bodyPr rtlCol="0" anchor="ctr"/>
+          <a:lstStyle/>
+          <a:p>
+            <a:pPr algn="ctr"/>
+          </a:p>
+        </p:txBody>
+      </p:sp>
+      <p:sp>
+        <p:nvSpPr>
+          <p:cNvPr id="4" name="TextBox 3"/>
           <p:cNvSpPr txBox="1"/>
           <p:nvPr/>
         </p:nvSpPr>
         <p:spPr>
           <a:xfrm>
-            <a:off x="914400" y="4572000"/>
+            <a:off x="1554480" y="3337560"/>
+            <a:ext cx="6035040" cy="1554480"/>
+          </a:xfrm>
+          <a:prstGeom prst="rect">
+            <a:avLst/>
+          </a:prstGeom>
+          <a:noFill/>
+        </p:spPr>
+        <p:txBody>
+          <a:bodyPr wrap="square">
+            <a:spAutoFit/>
+          </a:bodyPr>
+          <a:lstStyle/>
+          <a:p>
+            <a:pPr>
+              <a:defRPr sz="1600">
+                <a:solidFill>
+                  <a:srgbClr val="FFFFFF"/>
+                </a:solidFill>
+              </a:defRPr>
+            </a:pPr>
+            <a:r>
+              <a:t>你選擇加入我們，代表你認同我們的理念</a:t>
+            </a:r>
+          </a:p>
+          <a:p>
+            <a:pPr>
+              <a:defRPr sz="1600">
+                <a:solidFill>
+                  <a:srgbClr val="FFFFFF"/>
+                </a:solidFill>
+              </a:defRPr>
+            </a:pPr>
+          </a:p>
+          <a:p>
+            <a:pPr>
+              <a:defRPr sz="1600">
+                <a:solidFill>
+                  <a:srgbClr val="FFFFFF"/>
+                </a:solidFill>
+              </a:defRPr>
+            </a:pPr>
+            <a:r>
+              <a:t>這是一個快速成長的團隊</a:t>
+            </a:r>
+          </a:p>
+          <a:p>
+            <a:pPr>
+              <a:defRPr sz="1600">
+                <a:solidFill>
+                  <a:srgbClr val="FFFFFF"/>
+                </a:solidFill>
+              </a:defRPr>
+            </a:pPr>
+            <a:r>
+              <a:t>這是一個擁抱 AI 的時代</a:t>
+            </a:r>
+          </a:p>
+          <a:p>
+            <a:pPr>
+              <a:defRPr sz="1600">
+                <a:solidFill>
+                  <a:srgbClr val="FFFFFF"/>
+                </a:solidFill>
+              </a:defRPr>
+            </a:pPr>
+            <a:r>
+              <a:t>這是一個充滿機會的階段</a:t>
+            </a:r>
+          </a:p>
+          <a:p>
+            <a:pPr>
+              <a:defRPr sz="1600">
+                <a:solidFill>
+                  <a:srgbClr val="FFFFFF"/>
+                </a:solidFill>
+              </a:defRPr>
+            </a:pPr>
+          </a:p>
+          <a:p>
+            <a:pPr>
+              <a:defRPr sz="1600">
+                <a:solidFill>
+                  <a:srgbClr val="FFFFFF"/>
+                </a:solidFill>
+              </a:defRPr>
+            </a:pPr>
+            <a:r>
+              <a:t>讓我們一起駕馭工具、創造價值</a:t>
+            </a:r>
+          </a:p>
+        </p:txBody>
+      </p:sp>
+      <p:sp>
+        <p:nvSpPr>
+          <p:cNvPr id="5" name="TextBox 4"/>
+          <p:cNvSpPr txBox="1"/>
+          <p:nvPr/>
+        </p:nvSpPr>
+        <p:spPr>
+          <a:xfrm>
+            <a:off x="914400" y="5486400"/>
             <a:ext cx="7315200" cy="731520"/>
           </a:xfrm>
           <a:prstGeom prst="rect">
@@ -5541,50 +7157,50 @@
           <a:noFill/>
         </p:spPr>
         <p:txBody>
+          <a:bodyPr wrap="none">
+            <a:spAutoFit/>
+          </a:bodyPr>
+          <a:lstStyle/>
+          <a:p>
+            <a:pPr>
+              <a:defRPr sz="3200" b="1">
+                <a:solidFill>
+                  <a:srgbClr val="2C3E50"/>
+                </a:solidFill>
+              </a:defRPr>
+            </a:pPr>
+            <a:r>
+              <a:t>📞 聯絡資訊</a:t>
+            </a:r>
+          </a:p>
+        </p:txBody>
+      </p:sp>
+      <p:sp>
+        <p:nvSpPr>
+          <p:cNvPr id="3" name="TextBox 2"/>
+          <p:cNvSpPr txBox="1"/>
+          <p:nvPr/>
+        </p:nvSpPr>
+        <p:spPr>
+          <a:xfrm>
+            <a:off x="1828800" y="1828800"/>
+            <a:ext cx="5486400" cy="5029200"/>
+          </a:xfrm>
+          <a:prstGeom prst="rect">
+            <a:avLst/>
+          </a:prstGeom>
+          <a:noFill/>
+        </p:spPr>
+        <p:txBody>
           <a:bodyPr wrap="square">
             <a:spAutoFit/>
           </a:bodyPr>
           <a:lstStyle/>
           <a:p>
-            <a:pPr algn="l">
-              <a:defRPr sz="3200" b="1">
-                <a:solidFill>
-                  <a:srgbClr val="2C3E50"/>
-                </a:solidFill>
-              </a:defRPr>
-            </a:pPr>
-            <a:r>
-              <a:t>📞 聯絡資訊</a:t>
-            </a:r>
-          </a:p>
-        </p:txBody>
-      </p:sp>
-      <p:sp>
-        <p:nvSpPr>
-          <p:cNvPr id="3" name="TextBox 2"/>
-          <p:cNvSpPr txBox="1"/>
-          <p:nvPr/>
-        </p:nvSpPr>
-        <p:spPr>
-          <a:xfrm>
-            <a:off x="1828800" y="1828800"/>
-            <a:ext cx="5486400" cy="5029200"/>
-          </a:xfrm>
-          <a:prstGeom prst="rect">
-            <a:avLst/>
-          </a:prstGeom>
-          <a:noFill/>
-        </p:spPr>
-        <p:txBody>
-          <a:bodyPr wrap="square">
-            <a:spAutoFit/>
-          </a:bodyPr>
-          <a:lstStyle/>
-          <a:p>
             <a:pPr>
               <a:defRPr sz="1800">
                 <a:solidFill>
-                  <a:srgbClr val="505050"/>
+                  <a:srgbClr val="3C3C3C"/>
                 </a:solidFill>
               </a:defRPr>
             </a:pPr>
@@ -5596,7 +7212,7 @@
             <a:pPr>
               <a:defRPr sz="1800">
                 <a:solidFill>
-                  <a:srgbClr val="505050"/>
+                  <a:srgbClr val="3C3C3C"/>
                 </a:solidFill>
               </a:defRPr>
             </a:pPr>
@@ -5605,7 +7221,7 @@
             <a:pPr>
               <a:defRPr sz="1800">
                 <a:solidFill>
-                  <a:srgbClr val="505050"/>
+                  <a:srgbClr val="3C3C3C"/>
                 </a:solidFill>
               </a:defRPr>
             </a:pPr>
@@ -5617,7 +7233,7 @@
             <a:pPr>
               <a:defRPr sz="1800">
                 <a:solidFill>
-                  <a:srgbClr val="505050"/>
+                  <a:srgbClr val="3C3C3C"/>
                 </a:solidFill>
               </a:defRPr>
             </a:pPr>
@@ -5629,7 +7245,7 @@
             <a:pPr>
               <a:defRPr sz="1800">
                 <a:solidFill>
-                  <a:srgbClr val="505050"/>
+                  <a:srgbClr val="3C3C3C"/>
                 </a:solidFill>
               </a:defRPr>
             </a:pPr>
@@ -5641,7 +7257,7 @@
             <a:pPr>
               <a:defRPr sz="1800">
                 <a:solidFill>
-                  <a:srgbClr val="505050"/>
+                  <a:srgbClr val="3C3C3C"/>
                 </a:solidFill>
               </a:defRPr>
             </a:pPr>
@@ -5650,7 +7266,7 @@
             <a:pPr>
               <a:defRPr sz="1800">
                 <a:solidFill>
-                  <a:srgbClr val="505050"/>
+                  <a:srgbClr val="3C3C3C"/>
                 </a:solidFill>
               </a:defRPr>
             </a:pPr>
@@ -5662,40 +7278,28 @@
             <a:pPr>
               <a:defRPr sz="1800">
                 <a:solidFill>
-                  <a:srgbClr val="505050"/>
-                </a:solidFill>
-              </a:defRPr>
-            </a:pPr>
-            <a:r>
-              <a:t>Email：【待補充】</a:t>
-            </a:r>
+                  <a:srgbClr val="3C3C3C"/>
+                </a:solidFill>
+              </a:defRPr>
+            </a:pPr>
           </a:p>
           <a:p>
             <a:pPr>
               <a:defRPr sz="1800">
                 <a:solidFill>
-                  <a:srgbClr val="505050"/>
-                </a:solidFill>
-              </a:defRPr>
-            </a:pPr>
+                  <a:srgbClr val="3C3C3C"/>
+                </a:solidFill>
+              </a:defRPr>
+            </a:pPr>
+            <a:r>
+              <a:t>如有任何問題，歡迎隨時向直屬主管</a:t>
+            </a:r>
           </a:p>
           <a:p>
             <a:pPr>
               <a:defRPr sz="1800">
                 <a:solidFill>
-                  <a:srgbClr val="505050"/>
-                </a:solidFill>
-              </a:defRPr>
-            </a:pPr>
-            <a:r>
-              <a:t>如有任何問題，歡迎隨時向直屬主管</a:t>
-            </a:r>
-          </a:p>
-          <a:p>
-            <a:pPr>
-              <a:defRPr sz="1800">
-                <a:solidFill>
-                  <a:srgbClr val="505050"/>
+                  <a:srgbClr val="3C3C3C"/>
                 </a:solidFill>
               </a:defRPr>
             </a:pPr>
@@ -5748,34 +7352,69 @@
           <a:noFill/>
         </p:spPr>
         <p:txBody>
+          <a:bodyPr wrap="none">
+            <a:spAutoFit/>
+          </a:bodyPr>
+          <a:lstStyle/>
+          <a:p>
+            <a:pPr>
+              <a:defRPr sz="3200" b="1">
+                <a:solidFill>
+                  <a:srgbClr val="2C3E50"/>
+                </a:solidFill>
+              </a:defRPr>
+            </a:pPr>
+            <a:r>
+              <a:t>📖 品牌故事</a:t>
+            </a:r>
+          </a:p>
+        </p:txBody>
+      </p:sp>
+      <p:sp>
+        <p:nvSpPr>
+          <p:cNvPr id="3" name="TextBox 2"/>
+          <p:cNvSpPr txBox="1"/>
+          <p:nvPr/>
+        </p:nvSpPr>
+        <p:spPr>
+          <a:xfrm>
+            <a:off x="1371600" y="1645920"/>
+            <a:ext cx="6400800" cy="274320"/>
+          </a:xfrm>
+          <a:prstGeom prst="rect">
+            <a:avLst/>
+          </a:prstGeom>
+          <a:noFill/>
+        </p:spPr>
+        <p:txBody>
           <a:bodyPr wrap="square">
             <a:spAutoFit/>
           </a:bodyPr>
           <a:lstStyle/>
           <a:p>
             <a:pPr algn="l">
-              <a:defRPr sz="3200" b="1">
-                <a:solidFill>
-                  <a:srgbClr val="2C3E50"/>
-                </a:solidFill>
-              </a:defRPr>
-            </a:pPr>
-            <a:r>
-              <a:t>📖 品牌故事</a:t>
-            </a:r>
-          </a:p>
-        </p:txBody>
-      </p:sp>
-      <p:sp>
-        <p:nvSpPr>
-          <p:cNvPr id="3" name="TextBox 2"/>
+              <a:defRPr sz="1800" b="1">
+                <a:solidFill>
+                  <a:srgbClr val="27ACB2"/>
+                </a:solidFill>
+              </a:defRPr>
+            </a:pPr>
+            <a:r>
+              <a:t>2023/7</a:t>
+            </a:r>
+          </a:p>
+        </p:txBody>
+      </p:sp>
+      <p:sp>
+        <p:nvSpPr>
+          <p:cNvPr id="4" name="TextBox 3"/>
           <p:cNvSpPr txBox="1"/>
           <p:nvPr/>
         </p:nvSpPr>
         <p:spPr>
           <a:xfrm>
-            <a:off x="1371600" y="1371600"/>
-            <a:ext cx="6400800" cy="5029200"/>
+            <a:off x="1371600" y="1965960"/>
+            <a:ext cx="6400800" cy="548640"/>
           </a:xfrm>
           <a:prstGeom prst="rect">
             <a:avLst/>
@@ -5788,51 +7427,303 @@
           </a:bodyPr>
           <a:lstStyle/>
           <a:p>
-            <a:pPr>
-              <a:defRPr sz="1800">
+            <a:pPr algn="l">
+              <a:defRPr sz="1400" b="0">
                 <a:solidFill>
                   <a:srgbClr val="505050"/>
                 </a:solidFill>
               </a:defRPr>
             </a:pPr>
             <a:r>
-              <a:t>2023/7 - 第一家店開幕</a:t>
-            </a:r>
-          </a:p>
-          <a:p>
-            <a:pPr>
-              <a:defRPr sz="1800">
+              <a:t>第一家店開幕（無人概念，尚未導入AI）</a:t>
+            </a:r>
+          </a:p>
+        </p:txBody>
+      </p:sp>
+      <p:sp>
+        <p:nvSpPr>
+          <p:cNvPr id="5" name="TextBox 4"/>
+          <p:cNvSpPr txBox="1"/>
+          <p:nvPr/>
+        </p:nvSpPr>
+        <p:spPr>
+          <a:xfrm>
+            <a:off x="1371600" y="2651760"/>
+            <a:ext cx="6400800" cy="274320"/>
+          </a:xfrm>
+          <a:prstGeom prst="rect">
+            <a:avLst/>
+          </a:prstGeom>
+          <a:noFill/>
+        </p:spPr>
+        <p:txBody>
+          <a:bodyPr wrap="square">
+            <a:spAutoFit/>
+          </a:bodyPr>
+          <a:lstStyle/>
+          <a:p>
+            <a:pPr algn="l">
+              <a:defRPr sz="1800" b="1">
+                <a:solidFill>
+                  <a:srgbClr val="27ACB2"/>
+                </a:solidFill>
+              </a:defRPr>
+            </a:pPr>
+            <a:r>
+              <a:t>2023年底</a:t>
+            </a:r>
+          </a:p>
+        </p:txBody>
+      </p:sp>
+      <p:sp>
+        <p:nvSpPr>
+          <p:cNvPr id="6" name="TextBox 5"/>
+          <p:cNvSpPr txBox="1"/>
+          <p:nvPr/>
+        </p:nvSpPr>
+        <p:spPr>
+          <a:xfrm>
+            <a:off x="1371600" y="2971800"/>
+            <a:ext cx="6400800" cy="548640"/>
+          </a:xfrm>
+          <a:prstGeom prst="rect">
+            <a:avLst/>
+          </a:prstGeom>
+          <a:noFill/>
+        </p:spPr>
+        <p:txBody>
+          <a:bodyPr wrap="square">
+            <a:spAutoFit/>
+          </a:bodyPr>
+          <a:lstStyle/>
+          <a:p>
+            <a:pPr algn="l">
+              <a:defRPr sz="1400" b="0">
                 <a:solidFill>
                   <a:srgbClr val="505050"/>
                 </a:solidFill>
               </a:defRPr>
             </a:pPr>
             <a:r>
-              <a:t>2024 - 50 家店</a:t>
-            </a:r>
-          </a:p>
-          <a:p>
-            <a:pPr>
-              <a:defRPr sz="1800">
+              <a:t>拓展至 6 家店</a:t>
+            </a:r>
+          </a:p>
+        </p:txBody>
+      </p:sp>
+      <p:sp>
+        <p:nvSpPr>
+          <p:cNvPr id="7" name="TextBox 6"/>
+          <p:cNvSpPr txBox="1"/>
+          <p:nvPr/>
+        </p:nvSpPr>
+        <p:spPr>
+          <a:xfrm>
+            <a:off x="1371600" y="3657600"/>
+            <a:ext cx="6400800" cy="274320"/>
+          </a:xfrm>
+          <a:prstGeom prst="rect">
+            <a:avLst/>
+          </a:prstGeom>
+          <a:noFill/>
+        </p:spPr>
+        <p:txBody>
+          <a:bodyPr wrap="square">
+            <a:spAutoFit/>
+          </a:bodyPr>
+          <a:lstStyle/>
+          <a:p>
+            <a:pPr algn="l">
+              <a:defRPr sz="1800" b="1">
+                <a:solidFill>
+                  <a:srgbClr val="27ACB2"/>
+                </a:solidFill>
+              </a:defRPr>
+            </a:pPr>
+            <a:r>
+              <a:t>2024</a:t>
+            </a:r>
+          </a:p>
+        </p:txBody>
+      </p:sp>
+      <p:sp>
+        <p:nvSpPr>
+          <p:cNvPr id="8" name="TextBox 7"/>
+          <p:cNvSpPr txBox="1"/>
+          <p:nvPr/>
+        </p:nvSpPr>
+        <p:spPr>
+          <a:xfrm>
+            <a:off x="1371600" y="3977640"/>
+            <a:ext cx="6400800" cy="548640"/>
+          </a:xfrm>
+          <a:prstGeom prst="rect">
+            <a:avLst/>
+          </a:prstGeom>
+          <a:noFill/>
+        </p:spPr>
+        <p:txBody>
+          <a:bodyPr wrap="square">
+            <a:spAutoFit/>
+          </a:bodyPr>
+          <a:lstStyle/>
+          <a:p>
+            <a:pPr algn="l">
+              <a:defRPr sz="1400" b="0">
                 <a:solidFill>
                   <a:srgbClr val="505050"/>
                 </a:solidFill>
               </a:defRPr>
             </a:pPr>
             <a:r>
-              <a:t>2025 - 100 家店 + 10萬會員</a:t>
-            </a:r>
-          </a:p>
-          <a:p>
-            <a:pPr>
-              <a:defRPr sz="1800">
+              <a:t>快速擴張至 50 家店</a:t>
+            </a:r>
+          </a:p>
+        </p:txBody>
+      </p:sp>
+      <p:sp>
+        <p:nvSpPr>
+          <p:cNvPr id="9" name="TextBox 8"/>
+          <p:cNvSpPr txBox="1"/>
+          <p:nvPr/>
+        </p:nvSpPr>
+        <p:spPr>
+          <a:xfrm>
+            <a:off x="1371600" y="4663440"/>
+            <a:ext cx="6400800" cy="274320"/>
+          </a:xfrm>
+          <a:prstGeom prst="rect">
+            <a:avLst/>
+          </a:prstGeom>
+          <a:noFill/>
+        </p:spPr>
+        <p:txBody>
+          <a:bodyPr wrap="square">
+            <a:spAutoFit/>
+          </a:bodyPr>
+          <a:lstStyle/>
+          <a:p>
+            <a:pPr algn="l">
+              <a:defRPr sz="1800" b="1">
+                <a:solidFill>
+                  <a:srgbClr val="27ACB2"/>
+                </a:solidFill>
+              </a:defRPr>
+            </a:pPr>
+            <a:r>
+              <a:t>2025</a:t>
+            </a:r>
+          </a:p>
+        </p:txBody>
+      </p:sp>
+      <p:sp>
+        <p:nvSpPr>
+          <p:cNvPr id="10" name="TextBox 9"/>
+          <p:cNvSpPr txBox="1"/>
+          <p:nvPr/>
+        </p:nvSpPr>
+        <p:spPr>
+          <a:xfrm>
+            <a:off x="1371600" y="4983480"/>
+            <a:ext cx="6400800" cy="548640"/>
+          </a:xfrm>
+          <a:prstGeom prst="rect">
+            <a:avLst/>
+          </a:prstGeom>
+          <a:noFill/>
+        </p:spPr>
+        <p:txBody>
+          <a:bodyPr wrap="square">
+            <a:spAutoFit/>
+          </a:bodyPr>
+          <a:lstStyle/>
+          <a:p>
+            <a:pPr algn="l">
+              <a:defRPr sz="1400" b="0">
                 <a:solidFill>
                   <a:srgbClr val="505050"/>
                 </a:solidFill>
               </a:defRPr>
             </a:pPr>
             <a:r>
-              <a:t>2025/11 - 正式導入 AI</a:t>
+              <a:t>突破 100 家店，累積 10萬會員</a:t>
+            </a:r>
+            <a:br/>
+            <a:r>
+              <a:t>成立子品牌「智摸科技」</a:t>
+            </a:r>
+          </a:p>
+        </p:txBody>
+      </p:sp>
+      <p:sp>
+        <p:nvSpPr>
+          <p:cNvPr id="11" name="TextBox 10"/>
+          <p:cNvSpPr txBox="1"/>
+          <p:nvPr/>
+        </p:nvSpPr>
+        <p:spPr>
+          <a:xfrm>
+            <a:off x="1371600" y="5669280"/>
+            <a:ext cx="6400800" cy="274320"/>
+          </a:xfrm>
+          <a:prstGeom prst="rect">
+            <a:avLst/>
+          </a:prstGeom>
+          <a:noFill/>
+        </p:spPr>
+        <p:txBody>
+          <a:bodyPr wrap="square">
+            <a:spAutoFit/>
+          </a:bodyPr>
+          <a:lstStyle/>
+          <a:p>
+            <a:pPr algn="l">
+              <a:defRPr sz="1800" b="1">
+                <a:solidFill>
+                  <a:srgbClr val="27ACB2"/>
+                </a:solidFill>
+              </a:defRPr>
+            </a:pPr>
+            <a:r>
+              <a:t>2025/11</a:t>
+            </a:r>
+          </a:p>
+        </p:txBody>
+      </p:sp>
+      <p:sp>
+        <p:nvSpPr>
+          <p:cNvPr id="12" name="TextBox 11"/>
+          <p:cNvSpPr txBox="1"/>
+          <p:nvPr/>
+        </p:nvSpPr>
+        <p:spPr>
+          <a:xfrm>
+            <a:off x="1371600" y="5989320"/>
+            <a:ext cx="6400800" cy="548640"/>
+          </a:xfrm>
+          <a:prstGeom prst="rect">
+            <a:avLst/>
+          </a:prstGeom>
+          <a:noFill/>
+        </p:spPr>
+        <p:txBody>
+          <a:bodyPr wrap="square">
+            <a:spAutoFit/>
+          </a:bodyPr>
+          <a:lstStyle/>
+          <a:p>
+            <a:pPr algn="l">
+              <a:defRPr sz="1400" b="0">
+                <a:solidFill>
+                  <a:srgbClr val="505050"/>
+                </a:solidFill>
+              </a:defRPr>
+            </a:pPr>
+            <a:r>
+              <a:t>正式導入 AI 技術</a:t>
+            </a:r>
+            <a:br/>
+            <a:r>
+              <a:t>智能客服、選址系統、營運分析</a:t>
             </a:r>
           </a:p>
         </p:txBody>
@@ -5880,34 +7771,114 @@
           <a:noFill/>
         </p:spPr>
         <p:txBody>
+          <a:bodyPr wrap="none">
+            <a:spAutoFit/>
+          </a:bodyPr>
+          <a:lstStyle/>
+          <a:p>
+            <a:pPr>
+              <a:defRPr sz="3200" b="1">
+                <a:solidFill>
+                  <a:srgbClr val="2C3E50"/>
+                </a:solidFill>
+              </a:defRPr>
+            </a:pPr>
+            <a:r>
+              <a:t>👥 核心團隊</a:t>
+            </a:r>
+          </a:p>
+        </p:txBody>
+      </p:sp>
+      <p:sp>
+        <p:nvSpPr>
+          <p:cNvPr id="3" name="Rectangle 2"/>
+          <p:cNvSpPr/>
+          <p:nvPr/>
+        </p:nvSpPr>
+        <p:spPr>
+          <a:xfrm>
+            <a:off x="1371600" y="1828800"/>
+            <a:ext cx="2926080" cy="1645920"/>
+          </a:xfrm>
+          <a:prstGeom prst="rect">
+            <a:avLst/>
+          </a:prstGeom>
+          <a:solidFill>
+            <a:srgbClr val="F8F9FA"/>
+          </a:solidFill>
+          <a:ln w="25400">
+            <a:solidFill>
+              <a:srgbClr val="27ACB2"/>
+            </a:solidFill>
+          </a:ln>
+        </p:spPr>
+        <p:style>
+          <a:lnRef idx="1">
+            <a:schemeClr val="accent1"/>
+          </a:lnRef>
+          <a:fillRef idx="3">
+            <a:schemeClr val="accent1"/>
+          </a:fillRef>
+          <a:effectRef idx="2">
+            <a:schemeClr val="accent1"/>
+          </a:effectRef>
+          <a:fontRef idx="minor">
+            <a:schemeClr val="lt1"/>
+          </a:fontRef>
+        </p:style>
+        <p:txBody>
+          <a:bodyPr rtlCol="0" anchor="ctr"/>
+          <a:lstStyle/>
+          <a:p>
+            <a:pPr algn="ctr"/>
+          </a:p>
+        </p:txBody>
+      </p:sp>
+      <p:sp>
+        <p:nvSpPr>
+          <p:cNvPr id="4" name="TextBox 3"/>
+          <p:cNvSpPr txBox="1"/>
+          <p:nvPr/>
+        </p:nvSpPr>
+        <p:spPr>
+          <a:xfrm>
+            <a:off x="1371600" y="2011680"/>
+            <a:ext cx="2926080" cy="457200"/>
+          </a:xfrm>
+          <a:prstGeom prst="rect">
+            <a:avLst/>
+          </a:prstGeom>
+          <a:noFill/>
+        </p:spPr>
+        <p:txBody>
           <a:bodyPr wrap="square">
             <a:spAutoFit/>
           </a:bodyPr>
           <a:lstStyle/>
           <a:p>
-            <a:pPr algn="l">
-              <a:defRPr sz="3200" b="1">
-                <a:solidFill>
-                  <a:srgbClr val="2C3E50"/>
-                </a:solidFill>
-              </a:defRPr>
-            </a:pPr>
-            <a:r>
-              <a:t>👥 核心團隊</a:t>
-            </a:r>
-          </a:p>
-        </p:txBody>
-      </p:sp>
-      <p:sp>
-        <p:nvSpPr>
-          <p:cNvPr id="3" name="TextBox 2"/>
+            <a:pPr algn="ctr">
+              <a:defRPr sz="4000" b="0">
+                <a:solidFill>
+                  <a:srgbClr val="505050"/>
+                </a:solidFill>
+              </a:defRPr>
+            </a:pPr>
+            <a:r>
+              <a:t>👔</a:t>
+            </a:r>
+          </a:p>
+        </p:txBody>
+      </p:sp>
+      <p:sp>
+        <p:nvSpPr>
+          <p:cNvPr id="5" name="TextBox 4"/>
           <p:cNvSpPr txBox="1"/>
           <p:nvPr/>
         </p:nvSpPr>
         <p:spPr>
           <a:xfrm>
-            <a:off x="1371600" y="1371600"/>
-            <a:ext cx="6400800" cy="5029200"/>
+            <a:off x="1371600" y="2560320"/>
+            <a:ext cx="2926080" cy="365760"/>
           </a:xfrm>
           <a:prstGeom prst="rect">
             <a:avLst/>
@@ -5920,51 +7891,500 @@
           </a:bodyPr>
           <a:lstStyle/>
           <a:p>
-            <a:pPr>
-              <a:defRPr sz="1800">
+            <a:pPr algn="ctr">
+              <a:defRPr sz="2200" b="1">
+                <a:solidFill>
+                  <a:srgbClr val="2C3E50"/>
+                </a:solidFill>
+              </a:defRPr>
+            </a:pPr>
+            <a:r>
+              <a:t>林建佑</a:t>
+            </a:r>
+          </a:p>
+        </p:txBody>
+      </p:sp>
+      <p:sp>
+        <p:nvSpPr>
+          <p:cNvPr id="6" name="TextBox 5"/>
+          <p:cNvSpPr txBox="1"/>
+          <p:nvPr/>
+        </p:nvSpPr>
+        <p:spPr>
+          <a:xfrm>
+            <a:off x="1371600" y="2971800"/>
+            <a:ext cx="2926080" cy="365760"/>
+          </a:xfrm>
+          <a:prstGeom prst="rect">
+            <a:avLst/>
+          </a:prstGeom>
+          <a:noFill/>
+        </p:spPr>
+        <p:txBody>
+          <a:bodyPr wrap="square">
+            <a:spAutoFit/>
+          </a:bodyPr>
+          <a:lstStyle/>
+          <a:p>
+            <a:pPr algn="ctr">
+              <a:defRPr sz="1800" b="0">
+                <a:solidFill>
+                  <a:srgbClr val="27ACB2"/>
+                </a:solidFill>
+              </a:defRPr>
+            </a:pPr>
+            <a:r>
+              <a:t>負責人</a:t>
+            </a:r>
+          </a:p>
+        </p:txBody>
+      </p:sp>
+      <p:sp>
+        <p:nvSpPr>
+          <p:cNvPr id="7" name="Rectangle 6"/>
+          <p:cNvSpPr/>
+          <p:nvPr/>
+        </p:nvSpPr>
+        <p:spPr>
+          <a:xfrm>
+            <a:off x="4846320" y="1828800"/>
+            <a:ext cx="2926080" cy="1645920"/>
+          </a:xfrm>
+          <a:prstGeom prst="rect">
+            <a:avLst/>
+          </a:prstGeom>
+          <a:solidFill>
+            <a:srgbClr val="F8F9FA"/>
+          </a:solidFill>
+          <a:ln w="25400">
+            <a:solidFill>
+              <a:srgbClr val="27ACB2"/>
+            </a:solidFill>
+          </a:ln>
+        </p:spPr>
+        <p:style>
+          <a:lnRef idx="1">
+            <a:schemeClr val="accent1"/>
+          </a:lnRef>
+          <a:fillRef idx="3">
+            <a:schemeClr val="accent1"/>
+          </a:fillRef>
+          <a:effectRef idx="2">
+            <a:schemeClr val="accent1"/>
+          </a:effectRef>
+          <a:fontRef idx="minor">
+            <a:schemeClr val="lt1"/>
+          </a:fontRef>
+        </p:style>
+        <p:txBody>
+          <a:bodyPr rtlCol="0" anchor="ctr"/>
+          <a:lstStyle/>
+          <a:p>
+            <a:pPr algn="ctr"/>
+          </a:p>
+        </p:txBody>
+      </p:sp>
+      <p:sp>
+        <p:nvSpPr>
+          <p:cNvPr id="8" name="TextBox 7"/>
+          <p:cNvSpPr txBox="1"/>
+          <p:nvPr/>
+        </p:nvSpPr>
+        <p:spPr>
+          <a:xfrm>
+            <a:off x="4846320" y="2011680"/>
+            <a:ext cx="2926080" cy="457200"/>
+          </a:xfrm>
+          <a:prstGeom prst="rect">
+            <a:avLst/>
+          </a:prstGeom>
+          <a:noFill/>
+        </p:spPr>
+        <p:txBody>
+          <a:bodyPr wrap="square">
+            <a:spAutoFit/>
+          </a:bodyPr>
+          <a:lstStyle/>
+          <a:p>
+            <a:pPr algn="ctr">
+              <a:defRPr sz="4000" b="0">
                 <a:solidFill>
                   <a:srgbClr val="505050"/>
                 </a:solidFill>
               </a:defRPr>
             </a:pPr>
             <a:r>
-              <a:t>林建佑 - 負責人</a:t>
-            </a:r>
-          </a:p>
-          <a:p>
-            <a:pPr>
-              <a:defRPr sz="1800">
+              <a:t>💼</a:t>
+            </a:r>
+          </a:p>
+        </p:txBody>
+      </p:sp>
+      <p:sp>
+        <p:nvSpPr>
+          <p:cNvPr id="9" name="TextBox 8"/>
+          <p:cNvSpPr txBox="1"/>
+          <p:nvPr/>
+        </p:nvSpPr>
+        <p:spPr>
+          <a:xfrm>
+            <a:off x="4846320" y="2560320"/>
+            <a:ext cx="2926080" cy="365760"/>
+          </a:xfrm>
+          <a:prstGeom prst="rect">
+            <a:avLst/>
+          </a:prstGeom>
+          <a:noFill/>
+        </p:spPr>
+        <p:txBody>
+          <a:bodyPr wrap="square">
+            <a:spAutoFit/>
+          </a:bodyPr>
+          <a:lstStyle/>
+          <a:p>
+            <a:pPr algn="ctr">
+              <a:defRPr sz="2200" b="1">
+                <a:solidFill>
+                  <a:srgbClr val="2C3E50"/>
+                </a:solidFill>
+              </a:defRPr>
+            </a:pPr>
+            <a:r>
+              <a:t>林建宏 Ken（阿建）</a:t>
+            </a:r>
+          </a:p>
+        </p:txBody>
+      </p:sp>
+      <p:sp>
+        <p:nvSpPr>
+          <p:cNvPr id="10" name="TextBox 9"/>
+          <p:cNvSpPr txBox="1"/>
+          <p:nvPr/>
+        </p:nvSpPr>
+        <p:spPr>
+          <a:xfrm>
+            <a:off x="4846320" y="2971800"/>
+            <a:ext cx="2926080" cy="365760"/>
+          </a:xfrm>
+          <a:prstGeom prst="rect">
+            <a:avLst/>
+          </a:prstGeom>
+          <a:noFill/>
+        </p:spPr>
+        <p:txBody>
+          <a:bodyPr wrap="square">
+            <a:spAutoFit/>
+          </a:bodyPr>
+          <a:lstStyle/>
+          <a:p>
+            <a:pPr algn="ctr">
+              <a:defRPr sz="1800" b="0">
+                <a:solidFill>
+                  <a:srgbClr val="27ACB2"/>
+                </a:solidFill>
+              </a:defRPr>
+            </a:pPr>
+            <a:r>
+              <a:t>總經理</a:t>
+            </a:r>
+          </a:p>
+        </p:txBody>
+      </p:sp>
+      <p:sp>
+        <p:nvSpPr>
+          <p:cNvPr id="11" name="Rectangle 10"/>
+          <p:cNvSpPr/>
+          <p:nvPr/>
+        </p:nvSpPr>
+        <p:spPr>
+          <a:xfrm>
+            <a:off x="1371600" y="3840480"/>
+            <a:ext cx="2926080" cy="1645920"/>
+          </a:xfrm>
+          <a:prstGeom prst="rect">
+            <a:avLst/>
+          </a:prstGeom>
+          <a:solidFill>
+            <a:srgbClr val="F8F9FA"/>
+          </a:solidFill>
+          <a:ln w="25400">
+            <a:solidFill>
+              <a:srgbClr val="27ACB2"/>
+            </a:solidFill>
+          </a:ln>
+        </p:spPr>
+        <p:style>
+          <a:lnRef idx="1">
+            <a:schemeClr val="accent1"/>
+          </a:lnRef>
+          <a:fillRef idx="3">
+            <a:schemeClr val="accent1"/>
+          </a:fillRef>
+          <a:effectRef idx="2">
+            <a:schemeClr val="accent1"/>
+          </a:effectRef>
+          <a:fontRef idx="minor">
+            <a:schemeClr val="lt1"/>
+          </a:fontRef>
+        </p:style>
+        <p:txBody>
+          <a:bodyPr rtlCol="0" anchor="ctr"/>
+          <a:lstStyle/>
+          <a:p>
+            <a:pPr algn="ctr"/>
+          </a:p>
+        </p:txBody>
+      </p:sp>
+      <p:sp>
+        <p:nvSpPr>
+          <p:cNvPr id="12" name="TextBox 11"/>
+          <p:cNvSpPr txBox="1"/>
+          <p:nvPr/>
+        </p:nvSpPr>
+        <p:spPr>
+          <a:xfrm>
+            <a:off x="1371600" y="4023360"/>
+            <a:ext cx="2926080" cy="457200"/>
+          </a:xfrm>
+          <a:prstGeom prst="rect">
+            <a:avLst/>
+          </a:prstGeom>
+          <a:noFill/>
+        </p:spPr>
+        <p:txBody>
+          <a:bodyPr wrap="square">
+            <a:spAutoFit/>
+          </a:bodyPr>
+          <a:lstStyle/>
+          <a:p>
+            <a:pPr algn="ctr">
+              <a:defRPr sz="4000" b="0">
                 <a:solidFill>
                   <a:srgbClr val="505050"/>
                 </a:solidFill>
               </a:defRPr>
             </a:pPr>
             <a:r>
-              <a:t>林建宏 Ken（阿建）- 總經理</a:t>
-            </a:r>
-          </a:p>
-          <a:p>
-            <a:pPr>
-              <a:defRPr sz="1800">
+              <a:t>📱</a:t>
+            </a:r>
+          </a:p>
+        </p:txBody>
+      </p:sp>
+      <p:sp>
+        <p:nvSpPr>
+          <p:cNvPr id="13" name="TextBox 12"/>
+          <p:cNvSpPr txBox="1"/>
+          <p:nvPr/>
+        </p:nvSpPr>
+        <p:spPr>
+          <a:xfrm>
+            <a:off x="1371600" y="4572000"/>
+            <a:ext cx="2926080" cy="365760"/>
+          </a:xfrm>
+          <a:prstGeom prst="rect">
+            <a:avLst/>
+          </a:prstGeom>
+          <a:noFill/>
+        </p:spPr>
+        <p:txBody>
+          <a:bodyPr wrap="square">
+            <a:spAutoFit/>
+          </a:bodyPr>
+          <a:lstStyle/>
+          <a:p>
+            <a:pPr algn="ctr">
+              <a:defRPr sz="2200" b="1">
+                <a:solidFill>
+                  <a:srgbClr val="2C3E50"/>
+                </a:solidFill>
+              </a:defRPr>
+            </a:pPr>
+            <a:r>
+              <a:t>小圓</a:t>
+            </a:r>
+          </a:p>
+        </p:txBody>
+      </p:sp>
+      <p:sp>
+        <p:nvSpPr>
+          <p:cNvPr id="14" name="TextBox 13"/>
+          <p:cNvSpPr txBox="1"/>
+          <p:nvPr/>
+        </p:nvSpPr>
+        <p:spPr>
+          <a:xfrm>
+            <a:off x="1371600" y="4983480"/>
+            <a:ext cx="2926080" cy="365760"/>
+          </a:xfrm>
+          <a:prstGeom prst="rect">
+            <a:avLst/>
+          </a:prstGeom>
+          <a:noFill/>
+        </p:spPr>
+        <p:txBody>
+          <a:bodyPr wrap="square">
+            <a:spAutoFit/>
+          </a:bodyPr>
+          <a:lstStyle/>
+          <a:p>
+            <a:pPr algn="ctr">
+              <a:defRPr sz="1800" b="0">
+                <a:solidFill>
+                  <a:srgbClr val="27ACB2"/>
+                </a:solidFill>
+              </a:defRPr>
+            </a:pPr>
+            <a:r>
+              <a:t>業務</a:t>
+            </a:r>
+          </a:p>
+        </p:txBody>
+      </p:sp>
+      <p:sp>
+        <p:nvSpPr>
+          <p:cNvPr id="15" name="Rectangle 14"/>
+          <p:cNvSpPr/>
+          <p:nvPr/>
+        </p:nvSpPr>
+        <p:spPr>
+          <a:xfrm>
+            <a:off x="4846320" y="3840480"/>
+            <a:ext cx="2926080" cy="1645920"/>
+          </a:xfrm>
+          <a:prstGeom prst="rect">
+            <a:avLst/>
+          </a:prstGeom>
+          <a:solidFill>
+            <a:srgbClr val="F8F9FA"/>
+          </a:solidFill>
+          <a:ln w="25400">
+            <a:solidFill>
+              <a:srgbClr val="27ACB2"/>
+            </a:solidFill>
+          </a:ln>
+        </p:spPr>
+        <p:style>
+          <a:lnRef idx="1">
+            <a:schemeClr val="accent1"/>
+          </a:lnRef>
+          <a:fillRef idx="3">
+            <a:schemeClr val="accent1"/>
+          </a:fillRef>
+          <a:effectRef idx="2">
+            <a:schemeClr val="accent1"/>
+          </a:effectRef>
+          <a:fontRef idx="minor">
+            <a:schemeClr val="lt1"/>
+          </a:fontRef>
+        </p:style>
+        <p:txBody>
+          <a:bodyPr rtlCol="0" anchor="ctr"/>
+          <a:lstStyle/>
+          <a:p>
+            <a:pPr algn="ctr"/>
+          </a:p>
+        </p:txBody>
+      </p:sp>
+      <p:sp>
+        <p:nvSpPr>
+          <p:cNvPr id="16" name="TextBox 15"/>
+          <p:cNvSpPr txBox="1"/>
+          <p:nvPr/>
+        </p:nvSpPr>
+        <p:spPr>
+          <a:xfrm>
+            <a:off x="4846320" y="4023360"/>
+            <a:ext cx="2926080" cy="457200"/>
+          </a:xfrm>
+          <a:prstGeom prst="rect">
+            <a:avLst/>
+          </a:prstGeom>
+          <a:noFill/>
+        </p:spPr>
+        <p:txBody>
+          <a:bodyPr wrap="square">
+            <a:spAutoFit/>
+          </a:bodyPr>
+          <a:lstStyle/>
+          <a:p>
+            <a:pPr algn="ctr">
+              <a:defRPr sz="4000" b="0">
                 <a:solidFill>
                   <a:srgbClr val="505050"/>
                 </a:solidFill>
               </a:defRPr>
             </a:pPr>
             <a:r>
-              <a:t>小圓 - 業務</a:t>
-            </a:r>
-          </a:p>
-          <a:p>
-            <a:pPr>
-              <a:defRPr sz="1800">
-                <a:solidFill>
-                  <a:srgbClr val="505050"/>
-                </a:solidFill>
-              </a:defRPr>
-            </a:pPr>
-            <a:r>
-              <a:t>小兔 - 會計</a:t>
+              <a:t>💰</a:t>
+            </a:r>
+          </a:p>
+        </p:txBody>
+      </p:sp>
+      <p:sp>
+        <p:nvSpPr>
+          <p:cNvPr id="17" name="TextBox 16"/>
+          <p:cNvSpPr txBox="1"/>
+          <p:nvPr/>
+        </p:nvSpPr>
+        <p:spPr>
+          <a:xfrm>
+            <a:off x="4846320" y="4572000"/>
+            <a:ext cx="2926080" cy="365760"/>
+          </a:xfrm>
+          <a:prstGeom prst="rect">
+            <a:avLst/>
+          </a:prstGeom>
+          <a:noFill/>
+        </p:spPr>
+        <p:txBody>
+          <a:bodyPr wrap="square">
+            <a:spAutoFit/>
+          </a:bodyPr>
+          <a:lstStyle/>
+          <a:p>
+            <a:pPr algn="ctr">
+              <a:defRPr sz="2200" b="1">
+                <a:solidFill>
+                  <a:srgbClr val="2C3E50"/>
+                </a:solidFill>
+              </a:defRPr>
+            </a:pPr>
+            <a:r>
+              <a:t>小兔</a:t>
+            </a:r>
+          </a:p>
+        </p:txBody>
+      </p:sp>
+      <p:sp>
+        <p:nvSpPr>
+          <p:cNvPr id="18" name="TextBox 17"/>
+          <p:cNvSpPr txBox="1"/>
+          <p:nvPr/>
+        </p:nvSpPr>
+        <p:spPr>
+          <a:xfrm>
+            <a:off x="4846320" y="4983480"/>
+            <a:ext cx="2926080" cy="365760"/>
+          </a:xfrm>
+          <a:prstGeom prst="rect">
+            <a:avLst/>
+          </a:prstGeom>
+          <a:noFill/>
+        </p:spPr>
+        <p:txBody>
+          <a:bodyPr wrap="square">
+            <a:spAutoFit/>
+          </a:bodyPr>
+          <a:lstStyle/>
+          <a:p>
+            <a:pPr algn="ctr">
+              <a:defRPr sz="1800" b="0">
+                <a:solidFill>
+                  <a:srgbClr val="27ACB2"/>
+                </a:solidFill>
+              </a:defRPr>
+            </a:pPr>
+            <a:r>
+              <a:t>會計</a:t>
             </a:r>
           </a:p>
         </p:txBody>
@@ -6012,91 +8432,103 @@
           <a:noFill/>
         </p:spPr>
         <p:txBody>
+          <a:bodyPr wrap="none">
+            <a:spAutoFit/>
+          </a:bodyPr>
+          <a:lstStyle/>
+          <a:p>
+            <a:pPr>
+              <a:defRPr sz="3200" b="1">
+                <a:solidFill>
+                  <a:srgbClr val="2C3E50"/>
+                </a:solidFill>
+              </a:defRPr>
+            </a:pPr>
+            <a:r>
+              <a:t>🤖 AI 時代的轉型思維</a:t>
+            </a:r>
+          </a:p>
+        </p:txBody>
+      </p:sp>
+      <p:sp>
+        <p:nvSpPr>
+          <p:cNvPr id="3" name="TextBox 2"/>
+          <p:cNvSpPr txBox="1"/>
+          <p:nvPr/>
+        </p:nvSpPr>
+        <p:spPr>
+          <a:xfrm>
+            <a:off x="1371600" y="1371600"/>
+            <a:ext cx="6400800" cy="5029200"/>
+          </a:xfrm>
+          <a:prstGeom prst="rect">
+            <a:avLst/>
+          </a:prstGeom>
+          <a:noFill/>
+        </p:spPr>
+        <p:txBody>
           <a:bodyPr wrap="square">
             <a:spAutoFit/>
           </a:bodyPr>
           <a:lstStyle/>
           <a:p>
-            <a:pPr algn="l">
-              <a:defRPr sz="3200" b="1">
-                <a:solidFill>
-                  <a:srgbClr val="2C3E50"/>
-                </a:solidFill>
-              </a:defRPr>
-            </a:pPr>
-            <a:r>
-              <a:t>🤖 AI 時代的轉型思維</a:t>
-            </a:r>
-          </a:p>
-        </p:txBody>
-      </p:sp>
-      <p:sp>
-        <p:nvSpPr>
-          <p:cNvPr id="3" name="TextBox 2"/>
-          <p:cNvSpPr txBox="1"/>
-          <p:nvPr/>
-        </p:nvSpPr>
-        <p:spPr>
-          <a:xfrm>
-            <a:off x="1371600" y="1371600"/>
-            <a:ext cx="6400800" cy="5029200"/>
-          </a:xfrm>
-          <a:prstGeom prst="rect">
-            <a:avLst/>
-          </a:prstGeom>
-          <a:noFill/>
-        </p:spPr>
-        <p:txBody>
-          <a:bodyPr wrap="square">
-            <a:spAutoFit/>
-          </a:bodyPr>
-          <a:lstStyle/>
-          <a:p>
-            <a:pPr>
-              <a:defRPr sz="1800">
-                <a:solidFill>
-                  <a:srgbClr val="505050"/>
-                </a:solidFill>
-              </a:defRPr>
-            </a:pPr>
-            <a:r>
-              <a:t>正邁入 AI 時代（2-3年）</a:t>
-            </a:r>
-          </a:p>
-          <a:p>
-            <a:pPr>
-              <a:defRPr sz="1800">
-                <a:solidFill>
-                  <a:srgbClr val="505050"/>
-                </a:solidFill>
-              </a:defRPr>
-            </a:pPr>
-            <a:r>
-              <a:t>工具變化快</a:t>
-            </a:r>
-          </a:p>
-          <a:p>
-            <a:pPr>
-              <a:defRPr sz="1800">
-                <a:solidFill>
-                  <a:srgbClr val="505050"/>
-                </a:solidFill>
-              </a:defRPr>
-            </a:pPr>
-            <a:r>
-              <a:t>讓工具協助工作</a:t>
-            </a:r>
-          </a:p>
-          <a:p>
-            <a:pPr>
-              <a:defRPr sz="1800">
-                <a:solidFill>
-                  <a:srgbClr val="505050"/>
-                </a:solidFill>
-              </a:defRPr>
-            </a:pPr>
-            <a:r>
-              <a:t>效率可達過去10倍</a:t>
+            <a:pPr>
+              <a:defRPr sz="1600">
+                <a:solidFill>
+                  <a:srgbClr val="3C3C3C"/>
+                </a:solidFill>
+              </a:defRPr>
+            </a:pPr>
+            <a:r>
+              <a:t>我們正邁入 AI 時代（2-3 年轉型期）</a:t>
+            </a:r>
+          </a:p>
+          <a:p>
+            <a:pPr>
+              <a:defRPr sz="1600">
+                <a:solidFill>
+                  <a:srgbClr val="3C3C3C"/>
+                </a:solidFill>
+              </a:defRPr>
+            </a:pPr>
+            <a:r>
+              <a:t>工具變化快，輔助能力強</a:t>
+            </a:r>
+          </a:p>
+          <a:p>
+            <a:pPr>
+              <a:defRPr sz="1600">
+                <a:solidFill>
+                  <a:srgbClr val="3C3C3C"/>
+                </a:solidFill>
+              </a:defRPr>
+            </a:pPr>
+            <a:r>
+              <a:t>讓工具來協助工作，而非全靠人工</a:t>
+            </a:r>
+          </a:p>
+          <a:p>
+            <a:pPr>
+              <a:defRPr sz="1600">
+                <a:solidFill>
+                  <a:srgbClr val="3C3C3C"/>
+                </a:solidFill>
+              </a:defRPr>
+            </a:pPr>
+            <a:r>
+              <a:t>從「我來做」轉變為「我來管理工具做」</a:t>
+            </a:r>
+          </a:p>
+          <a:p>
+            <a:pPr>
+              <a:defRPr sz="1600">
+                <a:solidFill>
+                  <a:srgbClr val="3C3C3C"/>
+                </a:solidFill>
+              </a:defRPr>
+            </a:pPr>
+            <a:r>
+              <a:t>工作效率可以是過去的 10 倍甚至更多</a:t>
             </a:r>
           </a:p>
         </p:txBody>
@@ -6144,91 +8576,133 @@
           <a:noFill/>
         </p:spPr>
         <p:txBody>
+          <a:bodyPr wrap="none">
+            <a:spAutoFit/>
+          </a:bodyPr>
+          <a:lstStyle/>
+          <a:p>
+            <a:pPr>
+              <a:defRPr sz="3200" b="1">
+                <a:solidFill>
+                  <a:srgbClr val="2C3E50"/>
+                </a:solidFill>
+              </a:defRPr>
+            </a:pPr>
+            <a:r>
+              <a:t>🎯 駕馭 AI，而非被取代</a:t>
+            </a:r>
+          </a:p>
+        </p:txBody>
+      </p:sp>
+      <p:sp>
+        <p:nvSpPr>
+          <p:cNvPr id="3" name="TextBox 2"/>
+          <p:cNvSpPr txBox="1"/>
+          <p:nvPr/>
+        </p:nvSpPr>
+        <p:spPr>
+          <a:xfrm>
+            <a:off x="1371600" y="1371600"/>
+            <a:ext cx="6400800" cy="5029200"/>
+          </a:xfrm>
+          <a:prstGeom prst="rect">
+            <a:avLst/>
+          </a:prstGeom>
+          <a:noFill/>
+        </p:spPr>
+        <p:txBody>
           <a:bodyPr wrap="square">
             <a:spAutoFit/>
           </a:bodyPr>
           <a:lstStyle/>
           <a:p>
-            <a:pPr algn="l">
-              <a:defRPr sz="3200" b="1">
-                <a:solidFill>
-                  <a:srgbClr val="2C3E50"/>
-                </a:solidFill>
-              </a:defRPr>
-            </a:pPr>
-            <a:r>
-              <a:t>🎯 駕馭 AI，而非被取代</a:t>
-            </a:r>
-          </a:p>
-        </p:txBody>
-      </p:sp>
-      <p:sp>
-        <p:nvSpPr>
-          <p:cNvPr id="3" name="TextBox 2"/>
-          <p:cNvSpPr txBox="1"/>
-          <p:nvPr/>
-        </p:nvSpPr>
-        <p:spPr>
-          <a:xfrm>
-            <a:off x="1371600" y="1371600"/>
-            <a:ext cx="6400800" cy="5029200"/>
-          </a:xfrm>
-          <a:prstGeom prst="rect">
-            <a:avLst/>
-          </a:prstGeom>
-          <a:noFill/>
-        </p:spPr>
-        <p:txBody>
-          <a:bodyPr wrap="square">
-            <a:spAutoFit/>
-          </a:bodyPr>
-          <a:lstStyle/>
-          <a:p>
-            <a:pPr>
-              <a:defRPr sz="1800">
-                <a:solidFill>
-                  <a:srgbClr val="505050"/>
-                </a:solidFill>
-              </a:defRPr>
-            </a:pPr>
-            <a:r>
-              <a:t>不用擔心AI取代誰</a:t>
-            </a:r>
-          </a:p>
-          <a:p>
-            <a:pPr>
-              <a:defRPr sz="1800">
-                <a:solidFill>
-                  <a:srgbClr val="505050"/>
-                </a:solidFill>
-              </a:defRPr>
-            </a:pPr>
-            <a:r>
-              <a:t>重點是駕馭AI創造高效</a:t>
-            </a:r>
-          </a:p>
-          <a:p>
-            <a:pPr>
-              <a:defRPr sz="1800">
-                <a:solidFill>
-                  <a:srgbClr val="505050"/>
-                </a:solidFill>
-              </a:defRPr>
-            </a:pPr>
-            <a:r>
-              <a:t>不改革就會被淘汰</a:t>
-            </a:r>
-          </a:p>
-          <a:p>
-            <a:pPr>
-              <a:defRPr sz="1800">
-                <a:solidFill>
-                  <a:srgbClr val="505050"/>
-                </a:solidFill>
-              </a:defRPr>
-            </a:pPr>
-            <a:r>
-              <a:t>會用AI &gt; 不會用AI</a:t>
+            <a:pPr>
+              <a:defRPr sz="1600">
+                <a:solidFill>
+                  <a:srgbClr val="3C3C3C"/>
+                </a:solidFill>
+              </a:defRPr>
+            </a:pPr>
+            <a:r>
+              <a:t>⚠️ 不用擔心 AI 能取代掉誰</a:t>
+            </a:r>
+          </a:p>
+          <a:p>
+            <a:pPr>
+              <a:defRPr sz="1600">
+                <a:solidFill>
+                  <a:srgbClr val="3C3C3C"/>
+                </a:solidFill>
+              </a:defRPr>
+            </a:pPr>
+            <a:r>
+              <a:t>重點是如何駕馭 AI，創造更高效率及產值</a:t>
+            </a:r>
+          </a:p>
+          <a:p>
+            <a:pPr>
+              <a:defRPr sz="1600">
+                <a:solidFill>
+                  <a:srgbClr val="3C3C3C"/>
+                </a:solidFill>
+              </a:defRPr>
+            </a:pPr>
+          </a:p>
+          <a:p>
+            <a:pPr>
+              <a:defRPr sz="1600">
+                <a:solidFill>
+                  <a:srgbClr val="3C3C3C"/>
+                </a:solidFill>
+              </a:defRPr>
+            </a:pPr>
+            <a:r>
+              <a:t>不改革，就會被改革淘汰</a:t>
+            </a:r>
+          </a:p>
+          <a:p>
+            <a:pPr>
+              <a:defRPr sz="1600">
+                <a:solidFill>
+                  <a:srgbClr val="3C3C3C"/>
+                </a:solidFill>
+              </a:defRPr>
+            </a:pPr>
+          </a:p>
+          <a:p>
+            <a:pPr>
+              <a:defRPr sz="1600">
+                <a:solidFill>
+                  <a:srgbClr val="3C3C3C"/>
+                </a:solidFill>
+              </a:defRPr>
+            </a:pPr>
+            <a:r>
+              <a:t>⭐ 會用 AI 的人 &gt; 不會用 AI 的人</a:t>
+            </a:r>
+          </a:p>
+          <a:p>
+            <a:pPr>
+              <a:defRPr sz="1600">
+                <a:solidFill>
+                  <a:srgbClr val="3C3C3C"/>
+                </a:solidFill>
+              </a:defRPr>
+            </a:pPr>
+            <a:r>
+              <a:t>⭐ 主動學習工具 &gt; 固守舊方法</a:t>
+            </a:r>
+          </a:p>
+          <a:p>
+            <a:pPr>
+              <a:defRPr sz="1600">
+                <a:solidFill>
+                  <a:srgbClr val="3C3C3C"/>
+                </a:solidFill>
+              </a:defRPr>
+            </a:pPr>
+            <a:r>
+              <a:t>⭐ 擁抱變化 &gt; 抗拒變化</a:t>
             </a:r>
           </a:p>
         </p:txBody>
@@ -6276,91 +8750,160 @@
           <a:noFill/>
         </p:spPr>
         <p:txBody>
+          <a:bodyPr wrap="none">
+            <a:spAutoFit/>
+          </a:bodyPr>
+          <a:lstStyle/>
+          <a:p>
+            <a:pPr>
+              <a:defRPr sz="3200" b="1">
+                <a:solidFill>
+                  <a:srgbClr val="2C3E50"/>
+                </a:solidFill>
+              </a:defRPr>
+            </a:pPr>
+            <a:r>
+              <a:t>🚀 公司發展階段</a:t>
+            </a:r>
+          </a:p>
+        </p:txBody>
+      </p:sp>
+      <p:sp>
+        <p:nvSpPr>
+          <p:cNvPr id="3" name="TextBox 2"/>
+          <p:cNvSpPr txBox="1"/>
+          <p:nvPr/>
+        </p:nvSpPr>
+        <p:spPr>
+          <a:xfrm>
+            <a:off x="1371600" y="1371600"/>
+            <a:ext cx="6400800" cy="5029200"/>
+          </a:xfrm>
+          <a:prstGeom prst="rect">
+            <a:avLst/>
+          </a:prstGeom>
+          <a:noFill/>
+        </p:spPr>
+        <p:txBody>
           <a:bodyPr wrap="square">
             <a:spAutoFit/>
           </a:bodyPr>
           <a:lstStyle/>
           <a:p>
-            <a:pPr algn="l">
-              <a:defRPr sz="3200" b="1">
-                <a:solidFill>
-                  <a:srgbClr val="2C3E50"/>
-                </a:solidFill>
-              </a:defRPr>
-            </a:pPr>
-            <a:r>
-              <a:t>🚀 公司發展階段</a:t>
-            </a:r>
-          </a:p>
-        </p:txBody>
-      </p:sp>
-      <p:sp>
-        <p:nvSpPr>
-          <p:cNvPr id="3" name="TextBox 2"/>
-          <p:cNvSpPr txBox="1"/>
-          <p:nvPr/>
-        </p:nvSpPr>
-        <p:spPr>
-          <a:xfrm>
-            <a:off x="1371600" y="1371600"/>
-            <a:ext cx="6400800" cy="5029200"/>
-          </a:xfrm>
-          <a:prstGeom prst="rect">
-            <a:avLst/>
-          </a:prstGeom>
-          <a:noFill/>
-        </p:spPr>
-        <p:txBody>
-          <a:bodyPr wrap="square">
-            <a:spAutoFit/>
-          </a:bodyPr>
-          <a:lstStyle/>
-          <a:p>
-            <a:pPr>
-              <a:defRPr sz="1800">
-                <a:solidFill>
-                  <a:srgbClr val="505050"/>
-                </a:solidFill>
-              </a:defRPr>
-            </a:pPr>
-            <a:r>
-              <a:t>快速發展期：1家→105家（3年內）</a:t>
-            </a:r>
-          </a:p>
-          <a:p>
-            <a:pPr>
-              <a:defRPr sz="1800">
-                <a:solidFill>
-                  <a:srgbClr val="505050"/>
-                </a:solidFill>
-              </a:defRPr>
-            </a:pPr>
-            <a:r>
-              <a:t>無人概念→AI管理</a:t>
-            </a:r>
-          </a:p>
-          <a:p>
-            <a:pPr>
-              <a:defRPr sz="1800">
-                <a:solidFill>
-                  <a:srgbClr val="505050"/>
-                </a:solidFill>
-              </a:defRPr>
-            </a:pPr>
-            <a:r>
-              <a:t>需要共同衝刺的夥伴</a:t>
-            </a:r>
-          </a:p>
-          <a:p>
-            <a:pPr>
-              <a:defRPr sz="1800">
-                <a:solidFill>
-                  <a:srgbClr val="505050"/>
-                </a:solidFill>
-              </a:defRPr>
-            </a:pPr>
-            <a:r>
-              <a:t>能駕馭工具的人才</a:t>
+            <a:pPr>
+              <a:defRPr sz="1600">
+                <a:solidFill>
+                  <a:srgbClr val="3C3C3C"/>
+                </a:solidFill>
+              </a:defRPr>
+            </a:pPr>
+            <a:r>
+              <a:t>我們正處於快速發展期</a:t>
+            </a:r>
+          </a:p>
+          <a:p>
+            <a:pPr lvl="1">
+              <a:defRPr sz="1600">
+                <a:solidFill>
+                  <a:srgbClr val="3C3C3C"/>
+                </a:solidFill>
+              </a:defRPr>
+            </a:pPr>
+            <a:r>
+              <a:t>  從 1 家店 → 105 家店（不到 3 年）</a:t>
+            </a:r>
+          </a:p>
+          <a:p>
+            <a:pPr lvl="1">
+              <a:defRPr sz="1600">
+                <a:solidFill>
+                  <a:srgbClr val="3C3C3C"/>
+                </a:solidFill>
+              </a:defRPr>
+            </a:pPr>
+            <a:r>
+              <a:t>  從無人概念 → AI 智能管理</a:t>
+            </a:r>
+          </a:p>
+          <a:p>
+            <a:pPr lvl="1">
+              <a:defRPr sz="1600">
+                <a:solidFill>
+                  <a:srgbClr val="3C3C3C"/>
+                </a:solidFill>
+              </a:defRPr>
+            </a:pPr>
+            <a:r>
+              <a:t>  從單一品牌 → 多品牌布局（智摸科技）</a:t>
+            </a:r>
+          </a:p>
+          <a:p>
+            <a:pPr>
+              <a:defRPr sz="1600">
+                <a:solidFill>
+                  <a:srgbClr val="3C3C3C"/>
+                </a:solidFill>
+              </a:defRPr>
+            </a:pPr>
+          </a:p>
+          <a:p>
+            <a:pPr>
+              <a:defRPr sz="1600">
+                <a:solidFill>
+                  <a:srgbClr val="3C3C3C"/>
+                </a:solidFill>
+              </a:defRPr>
+            </a:pPr>
+            <a:r>
+              <a:t>我們需要什麼樣的夥伴？</a:t>
+            </a:r>
+          </a:p>
+          <a:p>
+            <a:pPr>
+              <a:defRPr sz="1600">
+                <a:solidFill>
+                  <a:srgbClr val="3C3C3C"/>
+                </a:solidFill>
+              </a:defRPr>
+            </a:pPr>
+            <a:r>
+              <a:t>🚀 願意共同衝刺的夥伴</a:t>
+            </a:r>
+          </a:p>
+          <a:p>
+            <a:pPr>
+              <a:defRPr sz="1600">
+                <a:solidFill>
+                  <a:srgbClr val="3C3C3C"/>
+                </a:solidFill>
+              </a:defRPr>
+            </a:pPr>
+            <a:r>
+              <a:t>🚀 能快速適應變化的員工</a:t>
+            </a:r>
+          </a:p>
+          <a:p>
+            <a:pPr>
+              <a:defRPr sz="1600">
+                <a:solidFill>
+                  <a:srgbClr val="3C3C3C"/>
+                </a:solidFill>
+              </a:defRPr>
+            </a:pPr>
+            <a:r>
+              <a:t>🚀 有主動學習精神的人</a:t>
+            </a:r>
+          </a:p>
+          <a:p>
+            <a:pPr>
+              <a:defRPr sz="1600">
+                <a:solidFill>
+                  <a:srgbClr val="3C3C3C"/>
+                </a:solidFill>
+              </a:defRPr>
+            </a:pPr>
+            <a:r>
+              <a:t>🚀 能駕馭工具創造價值的人才</a:t>
             </a:r>
           </a:p>
         </p:txBody>
@@ -6408,79 +8951,169 @@
           <a:noFill/>
         </p:spPr>
         <p:txBody>
+          <a:bodyPr wrap="none">
+            <a:spAutoFit/>
+          </a:bodyPr>
+          <a:lstStyle/>
+          <a:p>
+            <a:pPr>
+              <a:defRPr sz="3200" b="1">
+                <a:solidFill>
+                  <a:srgbClr val="2C3E50"/>
+                </a:solidFill>
+              </a:defRPr>
+            </a:pPr>
+            <a:r>
+              <a:t>💼 工作期待 - 醜話說在前面</a:t>
+            </a:r>
+          </a:p>
+        </p:txBody>
+      </p:sp>
+      <p:sp>
+        <p:nvSpPr>
+          <p:cNvPr id="3" name="TextBox 2"/>
+          <p:cNvSpPr txBox="1"/>
+          <p:nvPr/>
+        </p:nvSpPr>
+        <p:spPr>
+          <a:xfrm>
+            <a:off x="1371600" y="1371600"/>
+            <a:ext cx="6400800" cy="5029200"/>
+          </a:xfrm>
+          <a:prstGeom prst="rect">
+            <a:avLst/>
+          </a:prstGeom>
+          <a:noFill/>
+        </p:spPr>
+        <p:txBody>
           <a:bodyPr wrap="square">
             <a:spAutoFit/>
           </a:bodyPr>
           <a:lstStyle/>
           <a:p>
-            <a:pPr algn="l">
-              <a:defRPr sz="3200" b="1">
-                <a:solidFill>
-                  <a:srgbClr val="2C3E50"/>
-                </a:solidFill>
-              </a:defRPr>
-            </a:pPr>
-            <a:r>
-              <a:t>💼 工作期待 - 醜話說在前面</a:t>
-            </a:r>
-          </a:p>
-        </p:txBody>
-      </p:sp>
-      <p:sp>
-        <p:nvSpPr>
-          <p:cNvPr id="3" name="TextBox 2"/>
-          <p:cNvSpPr txBox="1"/>
-          <p:nvPr/>
-        </p:nvSpPr>
-        <p:spPr>
-          <a:xfrm>
-            <a:off x="1371600" y="1371600"/>
-            <a:ext cx="6400800" cy="5029200"/>
-          </a:xfrm>
-          <a:prstGeom prst="rect">
-            <a:avLst/>
-          </a:prstGeom>
-          <a:noFill/>
-        </p:spPr>
-        <p:txBody>
-          <a:bodyPr wrap="square">
-            <a:spAutoFit/>
-          </a:bodyPr>
-          <a:lstStyle/>
-          <a:p>
-            <a:pPr>
-              <a:defRPr sz="1800">
-                <a:solidFill>
-                  <a:srgbClr val="505050"/>
-                </a:solidFill>
-              </a:defRPr>
-            </a:pPr>
-            <a:r>
-              <a:t>🚫 最不喜歡聽到：「我不會」</a:t>
-            </a:r>
-          </a:p>
-          <a:p>
-            <a:pPr>
-              <a:defRPr sz="1800">
-                <a:solidFill>
-                  <a:srgbClr val="505050"/>
-                </a:solidFill>
-              </a:defRPr>
-            </a:pPr>
-            <a:r>
-              <a:t>基本能力：統整、資料收集（AI可輔助）</a:t>
-            </a:r>
-          </a:p>
-          <a:p>
-            <a:pPr>
-              <a:defRPr sz="1800">
-                <a:solidFill>
-                  <a:srgbClr val="505050"/>
-                </a:solidFill>
-              </a:defRPr>
-            </a:pPr>
-            <a:r>
-              <a:t>需要：會思考、會整理、會主動的人</a:t>
+            <a:pPr>
+              <a:defRPr sz="1600">
+                <a:solidFill>
+                  <a:srgbClr val="3C3C3C"/>
+                </a:solidFill>
+              </a:defRPr>
+            </a:pPr>
+            <a:r>
+              <a:t>🚫 Ken（阿建）最不喜歡聽到的話：「我不會」</a:t>
+            </a:r>
+          </a:p>
+          <a:p>
+            <a:pPr>
+              <a:defRPr sz="1600">
+                <a:solidFill>
+                  <a:srgbClr val="3C3C3C"/>
+                </a:solidFill>
+              </a:defRPr>
+            </a:pPr>
+          </a:p>
+          <a:p>
+            <a:pPr>
+              <a:defRPr sz="1600">
+                <a:solidFill>
+                  <a:srgbClr val="3C3C3C"/>
+                </a:solidFill>
+              </a:defRPr>
+            </a:pPr>
+            <a:r>
+              <a:t>在 AI 時代，這些是基本能力：</a:t>
+            </a:r>
+          </a:p>
+          <a:p>
+            <a:pPr>
+              <a:defRPr sz="1600">
+                <a:solidFill>
+                  <a:srgbClr val="3C3C3C"/>
+                </a:solidFill>
+              </a:defRPr>
+            </a:pPr>
+            <a:r>
+              <a:t>✅ 統整能力 - 整理資訊、歸納重點</a:t>
+            </a:r>
+          </a:p>
+          <a:p>
+            <a:pPr>
+              <a:defRPr sz="1600">
+                <a:solidFill>
+                  <a:srgbClr val="3C3C3C"/>
+                </a:solidFill>
+              </a:defRPr>
+            </a:pPr>
+            <a:r>
+              <a:t>✅ 資料收集 - 搜尋、彙整、分析</a:t>
+            </a:r>
+          </a:p>
+          <a:p>
+            <a:pPr>
+              <a:defRPr sz="1600">
+                <a:solidFill>
+                  <a:srgbClr val="3C3C3C"/>
+                </a:solidFill>
+              </a:defRPr>
+            </a:pPr>
+            <a:r>
+              <a:t>✅ AI 工具可以做很完整的協助</a:t>
+            </a:r>
+          </a:p>
+          <a:p>
+            <a:pPr>
+              <a:defRPr sz="1600">
+                <a:solidFill>
+                  <a:srgbClr val="3C3C3C"/>
+                </a:solidFill>
+              </a:defRPr>
+            </a:pPr>
+          </a:p>
+          <a:p>
+            <a:pPr>
+              <a:defRPr sz="1600">
+                <a:solidFill>
+                  <a:srgbClr val="3C3C3C"/>
+                </a:solidFill>
+              </a:defRPr>
+            </a:pPr>
+            <a:r>
+              <a:t>我們需要的是什麼人？</a:t>
+            </a:r>
+          </a:p>
+          <a:p>
+            <a:pPr>
+              <a:defRPr sz="1600">
+                <a:solidFill>
+                  <a:srgbClr val="3C3C3C"/>
+                </a:solidFill>
+              </a:defRPr>
+            </a:pPr>
+            <a:r>
+              <a:t>✅ 會思考的人</a:t>
+            </a:r>
+          </a:p>
+          <a:p>
+            <a:pPr>
+              <a:defRPr sz="1600">
+                <a:solidFill>
+                  <a:srgbClr val="3C3C3C"/>
+                </a:solidFill>
+              </a:defRPr>
+            </a:pPr>
+            <a:r>
+              <a:t>✅ 會整理的人</a:t>
+            </a:r>
+          </a:p>
+          <a:p>
+            <a:pPr>
+              <a:defRPr sz="1600">
+                <a:solidFill>
+                  <a:srgbClr val="3C3C3C"/>
+                </a:solidFill>
+              </a:defRPr>
+            </a:pPr>
+            <a:r>
+              <a:t>✅ 會主動嘗試的人</a:t>
             </a:r>
           </a:p>
         </p:txBody>
@@ -6528,79 +9161,181 @@
           <a:noFill/>
         </p:spPr>
         <p:txBody>
+          <a:bodyPr wrap="none">
+            <a:spAutoFit/>
+          </a:bodyPr>
+          <a:lstStyle/>
+          <a:p>
+            <a:pPr>
+              <a:defRPr sz="3200" b="1">
+                <a:solidFill>
+                  <a:srgbClr val="2C3E50"/>
+                </a:solidFill>
+              </a:defRPr>
+            </a:pPr>
+            <a:r>
+              <a:t>📋 正確的工作態度</a:t>
+            </a:r>
+          </a:p>
+        </p:txBody>
+      </p:sp>
+      <p:sp>
+        <p:nvSpPr>
+          <p:cNvPr id="3" name="TextBox 2"/>
+          <p:cNvSpPr txBox="1"/>
+          <p:nvPr/>
+        </p:nvSpPr>
+        <p:spPr>
+          <a:xfrm>
+            <a:off x="1371600" y="1371600"/>
+            <a:ext cx="6400800" cy="5029200"/>
+          </a:xfrm>
+          <a:prstGeom prst="rect">
+            <a:avLst/>
+          </a:prstGeom>
+          <a:noFill/>
+        </p:spPr>
+        <p:txBody>
           <a:bodyPr wrap="square">
             <a:spAutoFit/>
           </a:bodyPr>
           <a:lstStyle/>
           <a:p>
-            <a:pPr algn="l">
-              <a:defRPr sz="3200" b="1">
-                <a:solidFill>
-                  <a:srgbClr val="2C3E50"/>
-                </a:solidFill>
-              </a:defRPr>
-            </a:pPr>
-            <a:r>
-              <a:t>📋 正確的工作態度</a:t>
-            </a:r>
-          </a:p>
-        </p:txBody>
-      </p:sp>
-      <p:sp>
-        <p:nvSpPr>
-          <p:cNvPr id="3" name="TextBox 2"/>
-          <p:cNvSpPr txBox="1"/>
-          <p:nvPr/>
-        </p:nvSpPr>
-        <p:spPr>
-          <a:xfrm>
-            <a:off x="1371600" y="1371600"/>
-            <a:ext cx="6400800" cy="5029200"/>
-          </a:xfrm>
-          <a:prstGeom prst="rect">
-            <a:avLst/>
-          </a:prstGeom>
-          <a:noFill/>
-        </p:spPr>
-        <p:txBody>
-          <a:bodyPr wrap="square">
-            <a:spAutoFit/>
-          </a:bodyPr>
-          <a:lstStyle/>
-          <a:p>
-            <a:pPr>
-              <a:defRPr sz="1800">
-                <a:solidFill>
-                  <a:srgbClr val="505050"/>
-                </a:solidFill>
-              </a:defRPr>
-            </a:pPr>
-            <a:r>
-              <a:t>先彙整任務→初步結果→討論調整</a:t>
-            </a:r>
-          </a:p>
-          <a:p>
-            <a:pPr>
-              <a:defRPr sz="1800">
-                <a:solidFill>
-                  <a:srgbClr val="505050"/>
-                </a:solidFill>
-              </a:defRPr>
-            </a:pPr>
-            <a:r>
-              <a:t>✅可接受：結果不理想、判斷不同</a:t>
-            </a:r>
-          </a:p>
-          <a:p>
-            <a:pPr>
-              <a:defRPr sz="1800">
-                <a:solidFill>
-                  <a:srgbClr val="505050"/>
-                </a:solidFill>
-              </a:defRPr>
-            </a:pPr>
-            <a:r>
-              <a:t>❌不接受：沒嘗試就說不會</a:t>
+            <a:pPr>
+              <a:defRPr sz="1600">
+                <a:solidFill>
+                  <a:srgbClr val="3C3C3C"/>
+                </a:solidFill>
+              </a:defRPr>
+            </a:pPr>
+            <a:r>
+              <a:t>收到任務後，你應該：</a:t>
+            </a:r>
+          </a:p>
+          <a:p>
+            <a:pPr>
+              <a:defRPr sz="1600">
+                <a:solidFill>
+                  <a:srgbClr val="3C3C3C"/>
+                </a:solidFill>
+              </a:defRPr>
+            </a:pPr>
+            <a:r>
+              <a:t>🎯 先簡單彙整任務（用工具協助）</a:t>
+            </a:r>
+          </a:p>
+          <a:p>
+            <a:pPr>
+              <a:defRPr sz="1600">
+                <a:solidFill>
+                  <a:srgbClr val="3C3C3C"/>
+                </a:solidFill>
+              </a:defRPr>
+            </a:pPr>
+            <a:r>
+              <a:t>🎯 整理出初步結果（可以不完美）</a:t>
+            </a:r>
+          </a:p>
+          <a:p>
+            <a:pPr>
+              <a:defRPr sz="1600">
+                <a:solidFill>
+                  <a:srgbClr val="3C3C3C"/>
+                </a:solidFill>
+              </a:defRPr>
+            </a:pPr>
+            <a:r>
+              <a:t>🎯 開會時討論與調整</a:t>
+            </a:r>
+          </a:p>
+          <a:p>
+            <a:pPr>
+              <a:defRPr sz="1600">
+                <a:solidFill>
+                  <a:srgbClr val="3C3C3C"/>
+                </a:solidFill>
+              </a:defRPr>
+            </a:pPr>
+          </a:p>
+          <a:p>
+            <a:pPr>
+              <a:defRPr sz="1600">
+                <a:solidFill>
+                  <a:srgbClr val="3C3C3C"/>
+                </a:solidFill>
+              </a:defRPr>
+            </a:pPr>
+            <a:r>
+              <a:t>✅ 可以接受：</a:t>
+            </a:r>
+          </a:p>
+          <a:p>
+            <a:pPr lvl="1">
+              <a:defRPr sz="1600">
+                <a:solidFill>
+                  <a:srgbClr val="3C3C3C"/>
+                </a:solidFill>
+              </a:defRPr>
+            </a:pPr>
+            <a:r>
+              <a:t>  結果不盡理想 - 沒關係，可以調整</a:t>
+            </a:r>
+          </a:p>
+          <a:p>
+            <a:pPr lvl="1">
+              <a:defRPr sz="1600">
+                <a:solidFill>
+                  <a:srgbClr val="3C3C3C"/>
+                </a:solidFill>
+              </a:defRPr>
+            </a:pPr>
+            <a:r>
+              <a:t>  判斷有些不同 - 沒關係，可以討論</a:t>
+            </a:r>
+          </a:p>
+          <a:p>
+            <a:pPr>
+              <a:defRPr sz="1600">
+                <a:solidFill>
+                  <a:srgbClr val="3C3C3C"/>
+                </a:solidFill>
+              </a:defRPr>
+            </a:pPr>
+          </a:p>
+          <a:p>
+            <a:pPr>
+              <a:defRPr sz="1600">
+                <a:solidFill>
+                  <a:srgbClr val="3C3C3C"/>
+                </a:solidFill>
+              </a:defRPr>
+            </a:pPr>
+            <a:r>
+              <a:t>❌ 無法接受：</a:t>
+            </a:r>
+          </a:p>
+          <a:p>
+            <a:pPr lvl="1">
+              <a:defRPr sz="1600">
+                <a:solidFill>
+                  <a:srgbClr val="3C3C3C"/>
+                </a:solidFill>
+              </a:defRPr>
+            </a:pPr>
+            <a:r>
+              <a:t>  完全沒嘗試就說「我不會」</a:t>
+            </a:r>
+          </a:p>
+          <a:p>
+            <a:pPr lvl="1">
+              <a:defRPr sz="1600">
+                <a:solidFill>
+                  <a:srgbClr val="3C3C3C"/>
+                </a:solidFill>
+              </a:defRPr>
+            </a:pPr>
+            <a:r>
+              <a:t>  不思考、不整理，等別人給答案</a:t>
             </a:r>
           </a:p>
         </p:txBody>
